--- a/decks/SLG-06-Procurement-Grants.pptx
+++ b/decks/SLG-06-Procurement-Grants.pptx
@@ -4184,7 +4184,7 @@
         </p:nvSpPr>
         <p:spPr>
           <a:xfrm>
-            <a:off x="640080" y="365760"/>
+            <a:off x="457200" y="256032"/>
             <a:ext cx="10972800" cy="274320"/>
           </a:xfrm>
           <a:prstGeom prst="rect">
@@ -4220,8 +4220,8 @@
         </p:nvSpPr>
         <p:spPr>
           <a:xfrm>
-            <a:off x="640080" y="658368"/>
-            <a:ext cx="10972800" cy="502920"/>
+            <a:off x="457200" y="530352"/>
+            <a:ext cx="11338560" cy="457200"/>
           </a:xfrm>
           <a:prstGeom prst="rect">
             <a:avLst/>
@@ -4237,7 +4237,7 @@
               <a:buNone/>
             </a:pPr>
             <a:r>
-              <a:rPr lang="en-US" sz="2000" b="1" dirty="0">
+              <a:rPr lang="en-US" sz="1800" b="1" dirty="0">
                 <a:solidFill>
                   <a:srgbClr val="1B2440"/>
                 </a:solidFill>
@@ -4247,7 +4247,7 @@
               </a:rPr>
               <a:t>Procurement, Contracting &amp; Grants</a:t>
             </a:r>
-            <a:endParaRPr lang="en-US" sz="2000" dirty="0"/>
+            <a:endParaRPr lang="en-US" sz="1800" dirty="0"/>
           </a:p>
         </p:txBody>
       </p:sp>
@@ -4259,12 +4259,12 @@
         </p:nvSpPr>
         <p:spPr>
           <a:xfrm>
-            <a:off x="640080" y="1078992"/>
-            <a:ext cx="10881360" cy="384048"/>
+            <a:off x="457200" y="950976"/>
+            <a:ext cx="11274552" cy="365760"/>
           </a:xfrm>
           <a:prstGeom prst="roundRect">
             <a:avLst>
-              <a:gd name="adj" fmla="val 11905"/>
+              <a:gd name="adj" fmla="val 10000"/>
             </a:avLst>
           </a:prstGeom>
           <a:solidFill>
@@ -4281,8 +4281,8 @@
         </p:nvSpPr>
         <p:spPr>
           <a:xfrm>
-            <a:off x="841248" y="1078992"/>
-            <a:ext cx="10515600" cy="384048"/>
+            <a:off x="640080" y="950976"/>
+            <a:ext cx="10972800" cy="365760"/>
           </a:xfrm>
           <a:prstGeom prst="rect">
             <a:avLst/>
@@ -4298,7 +4298,7 @@
               <a:buNone/>
             </a:pPr>
             <a:r>
-              <a:rPr lang="en-US" sz="950" b="1" dirty="0">
+              <a:rPr lang="en-US" sz="900" b="1" dirty="0">
                 <a:solidFill>
                   <a:srgbClr val="9A6B12"/>
                 </a:solidFill>
@@ -4309,14 +4309,14 @@
               <a:buNone/>
             </a:pPr>
             <a:r>
-              <a:rPr lang="en-US" sz="950" dirty="0">
+              <a:rPr lang="en-US" sz="900" dirty="0">
                 <a:solidFill>
                   <a:srgbClr val="5B4708"/>
                 </a:solidFill>
               </a:rPr>
-              <a:t>STANDALONE-DEPLOYABLE — this agent ships its OWN VPC · Flow Logs · Bedrock VPC endpoint · KMS · Bedrock Guardrail · append-only audit + S3 Object Lock (WORM) · deny-by-default gateway · human gate. No WoG dependency; the Whole-of-Government platform is optional and additive.</a:t>
-            </a:r>
-            <a:endParaRPr lang="en-US" sz="950" dirty="0"/>
+              <a:t>STANDALONE-DEPLOYABLE — own VPC · CloudFront + WAF edge · KMS · WORM audit · gateway · human gate. No WoG dependency; the Whole-of-Government platform is optional and additive.</a:t>
+            </a:r>
+            <a:endParaRPr lang="en-US" sz="900" dirty="0"/>
           </a:p>
         </p:txBody>
       </p:sp>
@@ -4328,12 +4328,75 @@
         </p:nvSpPr>
         <p:spPr>
           <a:xfrm>
-            <a:off x="640080" y="1572768"/>
-            <a:ext cx="10881360" cy="512064"/>
+            <a:off x="457200" y="1444752"/>
+            <a:ext cx="1993392" cy="3310128"/>
           </a:xfrm>
           <a:prstGeom prst="roundRect">
             <a:avLst>
-              <a:gd name="adj" fmla="val 8929"/>
+              <a:gd name="adj" fmla="val 2294"/>
+            </a:avLst>
+          </a:prstGeom>
+          <a:solidFill>
+            <a:srgbClr val="F4F7FE"/>
+          </a:solidFill>
+          <a:ln w="12700">
+            <a:solidFill>
+              <a:srgbClr val="C2D0EC"/>
+            </a:solidFill>
+            <a:prstDash val="solid"/>
+          </a:ln>
+        </p:spPr>
+      </p:sp>
+      <p:sp>
+        <p:nvSpPr>
+          <p:cNvPr id="7" name="Text 5"/>
+          <p:cNvSpPr/>
+          <p:nvPr/>
+        </p:nvSpPr>
+        <p:spPr>
+          <a:xfrm>
+            <a:off x="566928" y="1499616"/>
+            <a:ext cx="1773936" cy="219456"/>
+          </a:xfrm>
+          <a:prstGeom prst="rect">
+            <a:avLst/>
+          </a:prstGeom>
+          <a:noFill/>
+          <a:ln/>
+        </p:spPr>
+        <p:txBody>
+          <a:bodyPr wrap="square" rtlCol="0" anchor="ctr"/>
+          <a:lstStyle/>
+          <a:p>
+            <a:pPr indent="0" marL="0">
+              <a:buNone/>
+            </a:pPr>
+            <a:r>
+              <a:rPr lang="en-US" sz="850" b="1" spc="100" kern="0" dirty="0">
+                <a:solidFill>
+                  <a:srgbClr val="1E2761"/>
+                </a:solidFill>
+              </a:rPr>
+              <a:t>EXTERNAL</a:t>
+            </a:r>
+            <a:endParaRPr lang="en-US" sz="850" dirty="0"/>
+          </a:p>
+        </p:txBody>
+      </p:sp>
+      <p:sp>
+        <p:nvSpPr>
+          <p:cNvPr id="8" name="Shape 6"/>
+          <p:cNvSpPr/>
+          <p:nvPr/>
+        </p:nvSpPr>
+        <p:spPr>
+          <a:xfrm>
+            <a:off x="566928" y="1755648"/>
+            <a:ext cx="1773936" cy="512064"/>
+          </a:xfrm>
+          <a:prstGeom prst="roundRect">
+            <a:avLst>
+              <a:gd name="adj" fmla="val 7143"/>
             </a:avLst>
           </a:prstGeom>
           <a:solidFill>
@@ -4351,97 +4414,58 @@
       </p:sp>
       <p:sp>
         <p:nvSpPr>
-          <p:cNvPr id="7" name="Text 5"/>
-          <p:cNvSpPr/>
-          <p:nvPr/>
-        </p:nvSpPr>
-        <p:spPr>
-          <a:xfrm>
-            <a:off x="868680" y="1645920"/>
-            <a:ext cx="3840480" cy="457200"/>
-          </a:xfrm>
-          <a:prstGeom prst="rect">
-            <a:avLst/>
-          </a:prstGeom>
-          <a:noFill/>
-          <a:ln/>
-        </p:spPr>
-        <p:txBody>
-          <a:bodyPr wrap="square" rtlCol="0" anchor="ctr"/>
-          <a:lstStyle/>
-          <a:p>
-            <a:pPr indent="0" marL="0">
-              <a:buNone/>
-            </a:pPr>
-            <a:r>
-              <a:rPr lang="en-US" sz="1250" b="1" dirty="0">
+          <p:cNvPr id="9" name="Text 7"/>
+          <p:cNvSpPr/>
+          <p:nvPr/>
+        </p:nvSpPr>
+        <p:spPr>
+          <a:xfrm>
+            <a:off x="621792" y="1755648"/>
+            <a:ext cx="1664208" cy="512064"/>
+          </a:xfrm>
+          <a:prstGeom prst="rect">
+            <a:avLst/>
+          </a:prstGeom>
+          <a:noFill/>
+          <a:ln/>
+        </p:spPr>
+        <p:txBody>
+          <a:bodyPr wrap="square" rtlCol="0" anchor="ctr"/>
+          <a:lstStyle/>
+          <a:p>
+            <a:pPr algn="ctr" indent="0" marL="0">
+              <a:buNone/>
+            </a:pPr>
+            <a:r>
+              <a:rPr lang="en-US" sz="880" dirty="0">
                 <a:solidFill>
                   <a:srgbClr val="FFFFFF"/>
                 </a:solidFill>
-                <a:latin typeface="Cambria" pitchFamily="34" charset="0"/>
-                <a:ea typeface="Cambria" pitchFamily="34" charset="-122"/>
-                <a:cs typeface="Cambria" pitchFamily="34" charset="-120"/>
-              </a:rPr>
-              <a:t>EDGE / FRONT-END SECURITY</a:t>
-            </a:r>
-            <a:endParaRPr lang="en-US" sz="1250" dirty="0"/>
-          </a:p>
-        </p:txBody>
-      </p:sp>
-      <p:sp>
-        <p:nvSpPr>
-          <p:cNvPr id="8" name="Text 6"/>
-          <p:cNvSpPr/>
-          <p:nvPr/>
-        </p:nvSpPr>
-        <p:spPr>
-          <a:xfrm>
-            <a:off x="4206240" y="1627632"/>
-            <a:ext cx="7132320" cy="402336"/>
-          </a:xfrm>
-          <a:prstGeom prst="rect">
-            <a:avLst/>
-          </a:prstGeom>
-          <a:noFill/>
-          <a:ln/>
-        </p:spPr>
-        <p:txBody>
-          <a:bodyPr wrap="square" rtlCol="0" anchor="ctr"/>
-          <a:lstStyle/>
-          <a:p>
-            <a:pPr indent="0" marL="0">
-              <a:buNone/>
-            </a:pPr>
-            <a:r>
-              <a:rPr lang="en-US" sz="1100" dirty="0">
-                <a:solidFill>
-                  <a:srgbClr val="CADCFC"/>
-                </a:solidFill>
-              </a:rPr>
-              <a:t>Amazon CloudFront (TLS 1.2+) + AWS WAF (managed rules — OWASP, known-bad-inputs, IP reputation, rate-limit) + Shield → API Gateway/ALB · Cognito (SAML→JWT, MFA at agency IdP) · PrivateLink to ERP / e-procurement · grants systems · IDP · KB</a:t>
-            </a:r>
-            <a:endParaRPr lang="en-US" sz="1100" dirty="0"/>
-          </a:p>
-        </p:txBody>
-      </p:sp>
-      <p:sp>
-        <p:nvSpPr>
-          <p:cNvPr id="9" name="Shape 7"/>
-          <p:cNvSpPr/>
-          <p:nvPr/>
-        </p:nvSpPr>
-        <p:spPr>
-          <a:xfrm>
-            <a:off x="640080" y="2103120"/>
-            <a:ext cx="10881360" cy="512064"/>
+              </a:rPr>
+              <a:t>Residents / agency staff</a:t>
+            </a:r>
+            <a:endParaRPr lang="en-US" sz="880" dirty="0"/>
+          </a:p>
+        </p:txBody>
+      </p:sp>
+      <p:sp>
+        <p:nvSpPr>
+          <p:cNvPr id="10" name="Shape 8"/>
+          <p:cNvSpPr/>
+          <p:nvPr/>
+        </p:nvSpPr>
+        <p:spPr>
+          <a:xfrm>
+            <a:off x="566928" y="2340864"/>
+            <a:ext cx="1773936" cy="512064"/>
           </a:xfrm>
           <a:prstGeom prst="roundRect">
             <a:avLst>
-              <a:gd name="adj" fmla="val 8929"/>
+              <a:gd name="adj" fmla="val 7143"/>
             </a:avLst>
           </a:prstGeom>
           <a:solidFill>
-            <a:srgbClr val="2A376E"/>
+            <a:srgbClr val="36406F"/>
           </a:solidFill>
           <a:ln/>
           <a:effectLst>
@@ -4455,76 +4479,37 @@
       </p:sp>
       <p:sp>
         <p:nvSpPr>
-          <p:cNvPr id="10" name="Text 8"/>
-          <p:cNvSpPr/>
-          <p:nvPr/>
-        </p:nvSpPr>
-        <p:spPr>
-          <a:xfrm>
-            <a:off x="868680" y="2176272"/>
-            <a:ext cx="3840480" cy="457200"/>
-          </a:xfrm>
-          <a:prstGeom prst="rect">
-            <a:avLst/>
-          </a:prstGeom>
-          <a:noFill/>
-          <a:ln/>
-        </p:spPr>
-        <p:txBody>
-          <a:bodyPr wrap="square" rtlCol="0" anchor="ctr"/>
-          <a:lstStyle/>
-          <a:p>
-            <a:pPr indent="0" marL="0">
-              <a:buNone/>
-            </a:pPr>
-            <a:r>
-              <a:rPr lang="en-US" sz="1250" b="1" dirty="0">
+          <p:cNvPr id="11" name="Text 9"/>
+          <p:cNvSpPr/>
+          <p:nvPr/>
+        </p:nvSpPr>
+        <p:spPr>
+          <a:xfrm>
+            <a:off x="621792" y="2340864"/>
+            <a:ext cx="1664208" cy="512064"/>
+          </a:xfrm>
+          <a:prstGeom prst="rect">
+            <a:avLst/>
+          </a:prstGeom>
+          <a:noFill/>
+          <a:ln/>
+        </p:spPr>
+        <p:txBody>
+          <a:bodyPr wrap="square" rtlCol="0" anchor="ctr"/>
+          <a:lstStyle/>
+          <a:p>
+            <a:pPr algn="ctr" indent="0" marL="0">
+              <a:buNone/>
+            </a:pPr>
+            <a:r>
+              <a:rPr lang="en-US" sz="880" dirty="0">
                 <a:solidFill>
                   <a:srgbClr val="FFFFFF"/>
                 </a:solidFill>
-                <a:latin typeface="Cambria" pitchFamily="34" charset="0"/>
-                <a:ea typeface="Cambria" pitchFamily="34" charset="-122"/>
-                <a:cs typeface="Cambria" pitchFamily="34" charset="-120"/>
-              </a:rPr>
-              <a:t>AGENT RUNTIME (private subnet)</a:t>
-            </a:r>
-            <a:endParaRPr lang="en-US" sz="1250" dirty="0"/>
-          </a:p>
-        </p:txBody>
-      </p:sp>
-      <p:sp>
-        <p:nvSpPr>
-          <p:cNvPr id="11" name="Text 9"/>
-          <p:cNvSpPr/>
-          <p:nvPr/>
-        </p:nvSpPr>
-        <p:spPr>
-          <a:xfrm>
-            <a:off x="4206240" y="2157984"/>
-            <a:ext cx="7132320" cy="402336"/>
-          </a:xfrm>
-          <a:prstGeom prst="rect">
-            <a:avLst/>
-          </a:prstGeom>
-          <a:noFill/>
-          <a:ln/>
-        </p:spPr>
-        <p:txBody>
-          <a:bodyPr wrap="square" rtlCol="0" anchor="ctr"/>
-          <a:lstStyle/>
-          <a:p>
-            <a:pPr indent="0" marL="0">
-              <a:buNone/>
-            </a:pPr>
-            <a:r>
-              <a:rPr lang="en-US" sz="1100" dirty="0">
-                <a:solidFill>
-                  <a:srgbClr val="CADCFC"/>
-                </a:solidFill>
-              </a:rPr>
-              <a:t>AWS Step Functions + Lambda (LangGraph agent) — waitForTaskToken human gate · or AgentCore Runtime (ARM64) · MCP authorization gateway (every tool call) · queue-driven autoscaling</a:t>
-            </a:r>
-            <a:endParaRPr lang="en-US" sz="1100" dirty="0"/>
+              </a:rPr>
+              <a:t>Agency IdP — SAML/OIDC · MFA</a:t>
+            </a:r>
+            <a:endParaRPr lang="en-US" sz="880" dirty="0"/>
           </a:p>
         </p:txBody>
       </p:sp>
@@ -4536,16 +4521,16 @@
         </p:nvSpPr>
         <p:spPr>
           <a:xfrm>
-            <a:off x="640080" y="2633472"/>
-            <a:ext cx="10881360" cy="512064"/>
+            <a:off x="566928" y="3108960"/>
+            <a:ext cx="1773936" cy="512064"/>
           </a:xfrm>
           <a:prstGeom prst="roundRect">
             <a:avLst>
-              <a:gd name="adj" fmla="val 8929"/>
+              <a:gd name="adj" fmla="val 7143"/>
             </a:avLst>
           </a:prstGeom>
           <a:solidFill>
-            <a:srgbClr val="1E2761"/>
+            <a:srgbClr val="4A5687"/>
           </a:solidFill>
           <a:ln/>
           <a:effectLst>
@@ -4565,91 +4550,52 @@
         </p:nvSpPr>
         <p:spPr>
           <a:xfrm>
-            <a:off x="868680" y="2706624"/>
-            <a:ext cx="3840480" cy="457200"/>
-          </a:xfrm>
-          <a:prstGeom prst="rect">
-            <a:avLst/>
-          </a:prstGeom>
-          <a:noFill/>
-          <a:ln/>
-        </p:spPr>
-        <p:txBody>
-          <a:bodyPr wrap="square" rtlCol="0" anchor="ctr"/>
-          <a:lstStyle/>
-          <a:p>
-            <a:pPr indent="0" marL="0">
-              <a:buNone/>
-            </a:pPr>
-            <a:r>
-              <a:rPr lang="en-US" sz="1250" b="1" dirty="0">
+            <a:off x="621792" y="3108960"/>
+            <a:ext cx="1664208" cy="512064"/>
+          </a:xfrm>
+          <a:prstGeom prst="rect">
+            <a:avLst/>
+          </a:prstGeom>
+          <a:noFill/>
+          <a:ln/>
+        </p:spPr>
+        <p:txBody>
+          <a:bodyPr wrap="square" rtlCol="0" anchor="ctr"/>
+          <a:lstStyle/>
+          <a:p>
+            <a:pPr algn="ctr" indent="0" marL="0">
+              <a:buNone/>
+            </a:pPr>
+            <a:r>
+              <a:rPr lang="en-US" sz="880" dirty="0">
                 <a:solidFill>
                   <a:srgbClr val="FFFFFF"/>
                 </a:solidFill>
-                <a:latin typeface="Cambria" pitchFamily="34" charset="0"/>
-                <a:ea typeface="Cambria" pitchFamily="34" charset="-122"/>
-                <a:cs typeface="Cambria" pitchFamily="34" charset="-120"/>
-              </a:rPr>
-              <a:t>MODEL LAYER (VPC endpoint)</a:t>
-            </a:r>
-            <a:endParaRPr lang="en-US" sz="1250" dirty="0"/>
-          </a:p>
-        </p:txBody>
-      </p:sp>
-      <p:sp>
-        <p:nvSpPr>
-          <p:cNvPr id="14" name="Text 12"/>
-          <p:cNvSpPr/>
-          <p:nvPr/>
-        </p:nvSpPr>
-        <p:spPr>
-          <a:xfrm>
-            <a:off x="4206240" y="2688336"/>
-            <a:ext cx="7132320" cy="402336"/>
-          </a:xfrm>
-          <a:prstGeom prst="rect">
-            <a:avLst/>
-          </a:prstGeom>
-          <a:noFill/>
-          <a:ln/>
-        </p:spPr>
-        <p:txBody>
-          <a:bodyPr wrap="square" rtlCol="0" anchor="ctr"/>
-          <a:lstStyle/>
-          <a:p>
-            <a:pPr indent="0" marL="0">
-              <a:buNone/>
-            </a:pPr>
-            <a:r>
-              <a:rPr lang="en-US" sz="1100" dirty="0">
-                <a:solidFill>
-                  <a:srgbClr val="CADCFC"/>
-                </a:solidFill>
-              </a:rPr>
-              <a:t>Amazon Bedrock — Claude Sonnet (draft) + Haiku (triage)  ·  Bedrock Guardrails — PII &amp; content filters (mandatory)</a:t>
-            </a:r>
-            <a:endParaRPr lang="en-US" sz="1100" dirty="0"/>
-          </a:p>
-        </p:txBody>
-      </p:sp>
-      <p:sp>
-        <p:nvSpPr>
-          <p:cNvPr id="15" name="Shape 13"/>
-          <p:cNvSpPr/>
-          <p:nvPr/>
-        </p:nvSpPr>
-        <p:spPr>
-          <a:xfrm>
-            <a:off x="640080" y="3163824"/>
-            <a:ext cx="10881360" cy="512064"/>
+              </a:rPr>
+              <a:t>Agency systems (on-prem)</a:t>
+            </a:r>
+            <a:endParaRPr lang="en-US" sz="880" dirty="0"/>
+          </a:p>
+        </p:txBody>
+      </p:sp>
+      <p:sp>
+        <p:nvSpPr>
+          <p:cNvPr id="14" name="Shape 12"/>
+          <p:cNvSpPr/>
+          <p:nvPr/>
+        </p:nvSpPr>
+        <p:spPr>
+          <a:xfrm>
+            <a:off x="566928" y="3694176"/>
+            <a:ext cx="1773936" cy="512064"/>
           </a:xfrm>
           <a:prstGeom prst="roundRect">
             <a:avLst>
-              <a:gd name="adj" fmla="val 8929"/>
+              <a:gd name="adj" fmla="val 7143"/>
             </a:avLst>
           </a:prstGeom>
           <a:solidFill>
-            <a:srgbClr val="2A376E"/>
+            <a:srgbClr val="4A5687"/>
           </a:solidFill>
           <a:ln/>
           <a:effectLst>
@@ -4663,14 +4609,113 @@
       </p:sp>
       <p:sp>
         <p:nvSpPr>
+          <p:cNvPr id="15" name="Text 13"/>
+          <p:cNvSpPr/>
+          <p:nvPr/>
+        </p:nvSpPr>
+        <p:spPr>
+          <a:xfrm>
+            <a:off x="621792" y="3694176"/>
+            <a:ext cx="1664208" cy="512064"/>
+          </a:xfrm>
+          <a:prstGeom prst="rect">
+            <a:avLst/>
+          </a:prstGeom>
+          <a:noFill/>
+          <a:ln/>
+        </p:spPr>
+        <p:txBody>
+          <a:bodyPr wrap="square" rtlCol="0" anchor="ctr"/>
+          <a:lstStyle/>
+          <a:p>
+            <a:pPr algn="ctr" indent="0" marL="0">
+              <a:buNone/>
+            </a:pPr>
+            <a:r>
+              <a:rPr lang="en-US" sz="880" dirty="0">
+                <a:solidFill>
+                  <a:srgbClr val="FFFFFF"/>
+                </a:solidFill>
+              </a:rPr>
+              <a:t>External data sources</a:t>
+            </a:r>
+            <a:endParaRPr lang="en-US" sz="880" dirty="0"/>
+          </a:p>
+        </p:txBody>
+      </p:sp>
+      <p:sp>
+        <p:nvSpPr>
           <p:cNvPr id="16" name="Text 14"/>
           <p:cNvSpPr/>
           <p:nvPr/>
         </p:nvSpPr>
         <p:spPr>
           <a:xfrm>
-            <a:off x="868680" y="3236976"/>
-            <a:ext cx="3840480" cy="457200"/>
+            <a:off x="566928" y="4334256"/>
+            <a:ext cx="1773936" cy="274320"/>
+          </a:xfrm>
+          <a:prstGeom prst="rect">
+            <a:avLst/>
+          </a:prstGeom>
+          <a:noFill/>
+          <a:ln/>
+        </p:spPr>
+        <p:txBody>
+          <a:bodyPr wrap="square" rtlCol="0" anchor="ctr"/>
+          <a:lstStyle/>
+          <a:p>
+            <a:pPr algn="ctr" indent="0" marL="0">
+              <a:buNone/>
+            </a:pPr>
+            <a:r>
+              <a:rPr lang="en-US" sz="700" i="1" dirty="0">
+                <a:solidFill>
+                  <a:srgbClr val="5B6488"/>
+                </a:solidFill>
+              </a:rPr>
+              <a:t>PrivateLink / Direct Connect</a:t>
+            </a:r>
+            <a:endParaRPr lang="en-US" sz="700" dirty="0"/>
+          </a:p>
+        </p:txBody>
+      </p:sp>
+      <p:sp>
+        <p:nvSpPr>
+          <p:cNvPr id="17" name="Shape 15"/>
+          <p:cNvSpPr/>
+          <p:nvPr/>
+        </p:nvSpPr>
+        <p:spPr>
+          <a:xfrm>
+            <a:off x="2615184" y="1444752"/>
+            <a:ext cx="9116568" cy="3310128"/>
+          </a:xfrm>
+          <a:prstGeom prst="roundRect">
+            <a:avLst>
+              <a:gd name="adj" fmla="val 1381"/>
+            </a:avLst>
+          </a:prstGeom>
+          <a:solidFill>
+            <a:srgbClr val="F4F7FE"/>
+          </a:solidFill>
+          <a:ln w="12700">
+            <a:solidFill>
+              <a:srgbClr val="C2D0EC"/>
+            </a:solidFill>
+            <a:prstDash val="solid"/>
+          </a:ln>
+        </p:spPr>
+      </p:sp>
+      <p:sp>
+        <p:nvSpPr>
+          <p:cNvPr id="18" name="Text 16"/>
+          <p:cNvSpPr/>
+          <p:nvPr/>
+        </p:nvSpPr>
+        <p:spPr>
+          <a:xfrm>
+            <a:off x="2724912" y="1499616"/>
+            <a:ext cx="8897112" cy="219456"/>
           </a:xfrm>
           <a:prstGeom prst="rect">
             <a:avLst/>
@@ -4686,51 +4731,199 @@
               <a:buNone/>
             </a:pPr>
             <a:r>
-              <a:rPr lang="en-US" sz="1250" b="1" dirty="0">
+              <a:rPr lang="en-US" sz="850" b="1" spc="100" kern="0" dirty="0">
+                <a:solidFill>
+                  <a:srgbClr val="1E2761"/>
+                </a:solidFill>
+              </a:rPr>
+              <a:t>AWS CLOUD — per-customer VPC / dedicated account</a:t>
+            </a:r>
+            <a:endParaRPr lang="en-US" sz="850" dirty="0"/>
+          </a:p>
+        </p:txBody>
+      </p:sp>
+      <p:sp>
+        <p:nvSpPr>
+          <p:cNvPr id="19" name="Shape 17"/>
+          <p:cNvSpPr/>
+          <p:nvPr/>
+        </p:nvSpPr>
+        <p:spPr>
+          <a:xfrm>
+            <a:off x="2743200" y="1773936"/>
+            <a:ext cx="2505456" cy="2852928"/>
+          </a:xfrm>
+          <a:prstGeom prst="roundRect">
+            <a:avLst>
+              <a:gd name="adj" fmla="val 1825"/>
+            </a:avLst>
+          </a:prstGeom>
+          <a:solidFill>
+            <a:srgbClr val="F4F7FE"/>
+          </a:solidFill>
+          <a:ln w="12700">
+            <a:solidFill>
+              <a:srgbClr val="C2D0EC"/>
+            </a:solidFill>
+            <a:prstDash val="solid"/>
+          </a:ln>
+        </p:spPr>
+      </p:sp>
+      <p:sp>
+        <p:nvSpPr>
+          <p:cNvPr id="20" name="Text 18"/>
+          <p:cNvSpPr/>
+          <p:nvPr/>
+        </p:nvSpPr>
+        <p:spPr>
+          <a:xfrm>
+            <a:off x="2852928" y="1828800"/>
+            <a:ext cx="2286000" cy="219456"/>
+          </a:xfrm>
+          <a:prstGeom prst="rect">
+            <a:avLst/>
+          </a:prstGeom>
+          <a:noFill/>
+          <a:ln/>
+        </p:spPr>
+        <p:txBody>
+          <a:bodyPr wrap="square" rtlCol="0" anchor="ctr"/>
+          <a:lstStyle/>
+          <a:p>
+            <a:pPr indent="0" marL="0">
+              <a:buNone/>
+            </a:pPr>
+            <a:r>
+              <a:rPr lang="en-US" sz="850" b="1" spc="100" kern="0" dirty="0">
+                <a:solidFill>
+                  <a:srgbClr val="1E2761"/>
+                </a:solidFill>
+              </a:rPr>
+              <a:t>EDGE / PUBLIC SUBNET</a:t>
+            </a:r>
+            <a:endParaRPr lang="en-US" sz="850" dirty="0"/>
+          </a:p>
+        </p:txBody>
+      </p:sp>
+      <p:sp>
+        <p:nvSpPr>
+          <p:cNvPr id="21" name="Shape 19"/>
+          <p:cNvSpPr/>
+          <p:nvPr/>
+        </p:nvSpPr>
+        <p:spPr>
+          <a:xfrm>
+            <a:off x="2852928" y="2066544"/>
+            <a:ext cx="2286000" cy="512064"/>
+          </a:xfrm>
+          <a:prstGeom prst="roundRect">
+            <a:avLst>
+              <a:gd name="adj" fmla="val 7143"/>
+            </a:avLst>
+          </a:prstGeom>
+          <a:solidFill>
+            <a:srgbClr val="1E2761"/>
+          </a:solidFill>
+          <a:ln/>
+          <a:effectLst>
+            <a:outerShdw sx="100000" sy="100000" kx="0" ky="0" algn="bl" rotWithShape="0" blurRad="88900" dist="38100" dir="5400000">
+              <a:srgbClr val="000000">
+                <a:alpha val="15000"/>
+              </a:srgbClr>
+            </a:outerShdw>
+          </a:effectLst>
+        </p:spPr>
+      </p:sp>
+      <p:sp>
+        <p:nvSpPr>
+          <p:cNvPr id="22" name="Text 20"/>
+          <p:cNvSpPr/>
+          <p:nvPr/>
+        </p:nvSpPr>
+        <p:spPr>
+          <a:xfrm>
+            <a:off x="2907792" y="2066544"/>
+            <a:ext cx="2176272" cy="512064"/>
+          </a:xfrm>
+          <a:prstGeom prst="rect">
+            <a:avLst/>
+          </a:prstGeom>
+          <a:noFill/>
+          <a:ln/>
+        </p:spPr>
+        <p:txBody>
+          <a:bodyPr wrap="square" rtlCol="0" anchor="ctr"/>
+          <a:lstStyle/>
+          <a:p>
+            <a:pPr algn="ctr" indent="0" marL="0">
+              <a:buNone/>
+            </a:pPr>
+            <a:r>
+              <a:rPr lang="en-US" sz="880" dirty="0">
                 <a:solidFill>
                   <a:srgbClr val="FFFFFF"/>
+                </a:solidFill>
+              </a:rPr>
+              <a:t>CloudFront + WAF + Shield (TLS 1.2+)</a:t>
+            </a:r>
+            <a:endParaRPr lang="en-US" sz="880" dirty="0"/>
+          </a:p>
+        </p:txBody>
+      </p:sp>
+      <p:sp>
+        <p:nvSpPr>
+          <p:cNvPr id="23" name="Shape 21"/>
+          <p:cNvSpPr/>
+          <p:nvPr/>
+        </p:nvSpPr>
+        <p:spPr>
+          <a:xfrm>
+            <a:off x="2761488" y="1993392"/>
+            <a:ext cx="274320" cy="274320"/>
+          </a:xfrm>
+          <a:prstGeom prst="ellipse">
+            <a:avLst/>
+          </a:prstGeom>
+          <a:solidFill>
+            <a:srgbClr val="E0A53B"/>
+          </a:solidFill>
+          <a:ln/>
+        </p:spPr>
+      </p:sp>
+      <p:sp>
+        <p:nvSpPr>
+          <p:cNvPr id="24" name="Text 22"/>
+          <p:cNvSpPr/>
+          <p:nvPr/>
+        </p:nvSpPr>
+        <p:spPr>
+          <a:xfrm>
+            <a:off x="2761488" y="1993392"/>
+            <a:ext cx="274320" cy="274320"/>
+          </a:xfrm>
+          <a:prstGeom prst="rect">
+            <a:avLst/>
+          </a:prstGeom>
+          <a:noFill/>
+          <a:ln/>
+        </p:spPr>
+        <p:txBody>
+          <a:bodyPr wrap="square" rtlCol="0" anchor="ctr"/>
+          <a:lstStyle/>
+          <a:p>
+            <a:pPr algn="ctr" indent="0" marL="0">
+              <a:buNone/>
+            </a:pPr>
+            <a:r>
+              <a:rPr lang="en-US" sz="1100" b="1" dirty="0">
+                <a:solidFill>
+                  <a:srgbClr val="3A2A05"/>
                 </a:solidFill>
                 <a:latin typeface="Cambria" pitchFamily="34" charset="0"/>
                 <a:ea typeface="Cambria" pitchFamily="34" charset="-122"/>
                 <a:cs typeface="Cambria" pitchFamily="34" charset="-120"/>
               </a:rPr>
-              <a:t>DATA TIER (KMS CMK per data class)</a:t>
-            </a:r>
-            <a:endParaRPr lang="en-US" sz="1250" dirty="0"/>
-          </a:p>
-        </p:txBody>
-      </p:sp>
-      <p:sp>
-        <p:nvSpPr>
-          <p:cNvPr id="17" name="Text 15"/>
-          <p:cNvSpPr/>
-          <p:nvPr/>
-        </p:nvSpPr>
-        <p:spPr>
-          <a:xfrm>
-            <a:off x="4206240" y="3218688"/>
-            <a:ext cx="7132320" cy="402336"/>
-          </a:xfrm>
-          <a:prstGeom prst="rect">
-            <a:avLst/>
-          </a:prstGeom>
-          <a:noFill/>
-          <a:ln/>
-        </p:spPr>
-        <p:txBody>
-          <a:bodyPr wrap="square" rtlCol="0" anchor="ctr"/>
-          <a:lstStyle/>
-          <a:p>
-            <a:pPr indent="0" marL="0">
-              <a:buNone/>
-            </a:pPr>
-            <a:r>
-              <a:rPr lang="en-US" sz="1100" dirty="0">
-                <a:solidFill>
-                  <a:srgbClr val="CADCFC"/>
-                </a:solidFill>
-              </a:rPr>
-              <a:t>DynamoDB — case state + append-only audit  ·  S3 Object Lock (WORM) — finalized records</a:t>
+              <a:t>2</a:t>
             </a:r>
             <a:endParaRPr lang="en-US" sz="1100" dirty="0"/>
           </a:p>
@@ -4738,21 +4931,1273 @@
       </p:sp>
       <p:sp>
         <p:nvSpPr>
-          <p:cNvPr id="18" name="Shape 16"/>
-          <p:cNvSpPr/>
-          <p:nvPr/>
-        </p:nvSpPr>
-        <p:spPr>
-          <a:xfrm>
-            <a:off x="640080" y="3767328"/>
-            <a:ext cx="10881360" cy="420624"/>
+          <p:cNvPr id="25" name="Shape 23"/>
+          <p:cNvSpPr/>
+          <p:nvPr/>
+        </p:nvSpPr>
+        <p:spPr>
+          <a:xfrm>
+            <a:off x="2852928" y="2724912"/>
+            <a:ext cx="2286000" cy="512064"/>
           </a:xfrm>
           <a:prstGeom prst="roundRect">
             <a:avLst>
-              <a:gd name="adj" fmla="val 10870"/>
+              <a:gd name="adj" fmla="val 7143"/>
             </a:avLst>
           </a:prstGeom>
           <a:solidFill>
+            <a:srgbClr val="2A376E"/>
+          </a:solidFill>
+          <a:ln/>
+          <a:effectLst>
+            <a:outerShdw sx="100000" sy="100000" kx="0" ky="0" algn="bl" rotWithShape="0" blurRad="88900" dist="38100" dir="5400000">
+              <a:srgbClr val="000000">
+                <a:alpha val="15000"/>
+              </a:srgbClr>
+            </a:outerShdw>
+          </a:effectLst>
+        </p:spPr>
+      </p:sp>
+      <p:sp>
+        <p:nvSpPr>
+          <p:cNvPr id="26" name="Text 24"/>
+          <p:cNvSpPr/>
+          <p:nvPr/>
+        </p:nvSpPr>
+        <p:spPr>
+          <a:xfrm>
+            <a:off x="2907792" y="2724912"/>
+            <a:ext cx="2176272" cy="512064"/>
+          </a:xfrm>
+          <a:prstGeom prst="rect">
+            <a:avLst/>
+          </a:prstGeom>
+          <a:noFill/>
+          <a:ln/>
+        </p:spPr>
+        <p:txBody>
+          <a:bodyPr wrap="square" rtlCol="0" anchor="ctr"/>
+          <a:lstStyle/>
+          <a:p>
+            <a:pPr algn="ctr" indent="0" marL="0">
+              <a:buNone/>
+            </a:pPr>
+            <a:r>
+              <a:rPr lang="en-US" sz="880" dirty="0">
+                <a:solidFill>
+                  <a:srgbClr val="FFFFFF"/>
+                </a:solidFill>
+              </a:rPr>
+              <a:t>API Gateway / ALB</a:t>
+            </a:r>
+            <a:endParaRPr lang="en-US" sz="880" dirty="0"/>
+          </a:p>
+        </p:txBody>
+      </p:sp>
+      <p:sp>
+        <p:nvSpPr>
+          <p:cNvPr id="27" name="Shape 25"/>
+          <p:cNvSpPr/>
+          <p:nvPr/>
+        </p:nvSpPr>
+        <p:spPr>
+          <a:xfrm>
+            <a:off x="2852928" y="3383280"/>
+            <a:ext cx="2286000" cy="512064"/>
+          </a:xfrm>
+          <a:prstGeom prst="roundRect">
+            <a:avLst>
+              <a:gd name="adj" fmla="val 7143"/>
+            </a:avLst>
+          </a:prstGeom>
+          <a:solidFill>
+            <a:srgbClr val="2A376E"/>
+          </a:solidFill>
+          <a:ln/>
+          <a:effectLst>
+            <a:outerShdw sx="100000" sy="100000" kx="0" ky="0" algn="bl" rotWithShape="0" blurRad="88900" dist="38100" dir="5400000">
+              <a:srgbClr val="000000">
+                <a:alpha val="15000"/>
+              </a:srgbClr>
+            </a:outerShdw>
+          </a:effectLst>
+        </p:spPr>
+      </p:sp>
+      <p:sp>
+        <p:nvSpPr>
+          <p:cNvPr id="28" name="Text 26"/>
+          <p:cNvSpPr/>
+          <p:nvPr/>
+        </p:nvSpPr>
+        <p:spPr>
+          <a:xfrm>
+            <a:off x="2907792" y="3383280"/>
+            <a:ext cx="2176272" cy="512064"/>
+          </a:xfrm>
+          <a:prstGeom prst="rect">
+            <a:avLst/>
+          </a:prstGeom>
+          <a:noFill/>
+          <a:ln/>
+        </p:spPr>
+        <p:txBody>
+          <a:bodyPr wrap="square" rtlCol="0" anchor="ctr"/>
+          <a:lstStyle/>
+          <a:p>
+            <a:pPr algn="ctr" indent="0" marL="0">
+              <a:buNone/>
+            </a:pPr>
+            <a:r>
+              <a:rPr lang="en-US" sz="880" dirty="0">
+                <a:solidFill>
+                  <a:srgbClr val="FFFFFF"/>
+                </a:solidFill>
+              </a:rPr>
+              <a:t>Amazon Cognito — SAML → JWT</a:t>
+            </a:r>
+            <a:endParaRPr lang="en-US" sz="880" dirty="0"/>
+          </a:p>
+        </p:txBody>
+      </p:sp>
+      <p:sp>
+        <p:nvSpPr>
+          <p:cNvPr id="29" name="Shape 27"/>
+          <p:cNvSpPr/>
+          <p:nvPr/>
+        </p:nvSpPr>
+        <p:spPr>
+          <a:xfrm>
+            <a:off x="2761488" y="3310128"/>
+            <a:ext cx="274320" cy="274320"/>
+          </a:xfrm>
+          <a:prstGeom prst="ellipse">
+            <a:avLst/>
+          </a:prstGeom>
+          <a:solidFill>
+            <a:srgbClr val="E0A53B"/>
+          </a:solidFill>
+          <a:ln/>
+        </p:spPr>
+      </p:sp>
+      <p:sp>
+        <p:nvSpPr>
+          <p:cNvPr id="30" name="Text 28"/>
+          <p:cNvSpPr/>
+          <p:nvPr/>
+        </p:nvSpPr>
+        <p:spPr>
+          <a:xfrm>
+            <a:off x="2761488" y="3310128"/>
+            <a:ext cx="274320" cy="274320"/>
+          </a:xfrm>
+          <a:prstGeom prst="rect">
+            <a:avLst/>
+          </a:prstGeom>
+          <a:noFill/>
+          <a:ln/>
+        </p:spPr>
+        <p:txBody>
+          <a:bodyPr wrap="square" rtlCol="0" anchor="ctr"/>
+          <a:lstStyle/>
+          <a:p>
+            <a:pPr algn="ctr" indent="0" marL="0">
+              <a:buNone/>
+            </a:pPr>
+            <a:r>
+              <a:rPr lang="en-US" sz="1100" b="1" dirty="0">
+                <a:solidFill>
+                  <a:srgbClr val="3A2A05"/>
+                </a:solidFill>
+                <a:latin typeface="Cambria" pitchFamily="34" charset="0"/>
+                <a:ea typeface="Cambria" pitchFamily="34" charset="-122"/>
+                <a:cs typeface="Cambria" pitchFamily="34" charset="-120"/>
+              </a:rPr>
+              <a:t>1</a:t>
+            </a:r>
+            <a:endParaRPr lang="en-US" sz="1100" dirty="0"/>
+          </a:p>
+        </p:txBody>
+      </p:sp>
+      <p:sp>
+        <p:nvSpPr>
+          <p:cNvPr id="31" name="Shape 29"/>
+          <p:cNvSpPr/>
+          <p:nvPr/>
+        </p:nvSpPr>
+        <p:spPr>
+          <a:xfrm>
+            <a:off x="5358384" y="1773936"/>
+            <a:ext cx="2505456" cy="2852928"/>
+          </a:xfrm>
+          <a:prstGeom prst="roundRect">
+            <a:avLst>
+              <a:gd name="adj" fmla="val 1825"/>
+            </a:avLst>
+          </a:prstGeom>
+          <a:solidFill>
+            <a:srgbClr val="F4F7FE"/>
+          </a:solidFill>
+          <a:ln w="12700">
+            <a:solidFill>
+              <a:srgbClr val="C2D0EC"/>
+            </a:solidFill>
+            <a:prstDash val="solid"/>
+          </a:ln>
+        </p:spPr>
+      </p:sp>
+      <p:sp>
+        <p:nvSpPr>
+          <p:cNvPr id="32" name="Text 30"/>
+          <p:cNvSpPr/>
+          <p:nvPr/>
+        </p:nvSpPr>
+        <p:spPr>
+          <a:xfrm>
+            <a:off x="5468112" y="1828800"/>
+            <a:ext cx="2286000" cy="219456"/>
+          </a:xfrm>
+          <a:prstGeom prst="rect">
+            <a:avLst/>
+          </a:prstGeom>
+          <a:noFill/>
+          <a:ln/>
+        </p:spPr>
+        <p:txBody>
+          <a:bodyPr wrap="square" rtlCol="0" anchor="ctr"/>
+          <a:lstStyle/>
+          <a:p>
+            <a:pPr indent="0" marL="0">
+              <a:buNone/>
+            </a:pPr>
+            <a:r>
+              <a:rPr lang="en-US" sz="850" b="1" spc="100" kern="0" dirty="0">
+                <a:solidFill>
+                  <a:srgbClr val="1E2761"/>
+                </a:solidFill>
+              </a:rPr>
+              <a:t>PRIVATE SUBNET — COMPUTE</a:t>
+            </a:r>
+            <a:endParaRPr lang="en-US" sz="850" dirty="0"/>
+          </a:p>
+        </p:txBody>
+      </p:sp>
+      <p:sp>
+        <p:nvSpPr>
+          <p:cNvPr id="33" name="Shape 31"/>
+          <p:cNvSpPr/>
+          <p:nvPr/>
+        </p:nvSpPr>
+        <p:spPr>
+          <a:xfrm>
+            <a:off x="5468112" y="2066544"/>
+            <a:ext cx="2286000" cy="512064"/>
+          </a:xfrm>
+          <a:prstGeom prst="roundRect">
+            <a:avLst>
+              <a:gd name="adj" fmla="val 7143"/>
+            </a:avLst>
+          </a:prstGeom>
+          <a:solidFill>
+            <a:srgbClr val="2A376E"/>
+          </a:solidFill>
+          <a:ln/>
+          <a:effectLst>
+            <a:outerShdw sx="100000" sy="100000" kx="0" ky="0" algn="bl" rotWithShape="0" blurRad="88900" dist="38100" dir="5400000">
+              <a:srgbClr val="000000">
+                <a:alpha val="15000"/>
+              </a:srgbClr>
+            </a:outerShdw>
+          </a:effectLst>
+        </p:spPr>
+      </p:sp>
+      <p:sp>
+        <p:nvSpPr>
+          <p:cNvPr id="34" name="Text 32"/>
+          <p:cNvSpPr/>
+          <p:nvPr/>
+        </p:nvSpPr>
+        <p:spPr>
+          <a:xfrm>
+            <a:off x="5522976" y="2066544"/>
+            <a:ext cx="2176272" cy="512064"/>
+          </a:xfrm>
+          <a:prstGeom prst="rect">
+            <a:avLst/>
+          </a:prstGeom>
+          <a:noFill/>
+          <a:ln/>
+        </p:spPr>
+        <p:txBody>
+          <a:bodyPr wrap="square" rtlCol="0" anchor="ctr"/>
+          <a:lstStyle/>
+          <a:p>
+            <a:pPr algn="ctr" indent="0" marL="0">
+              <a:buNone/>
+            </a:pPr>
+            <a:r>
+              <a:rPr lang="en-US" sz="880" dirty="0">
+                <a:solidFill>
+                  <a:srgbClr val="FFFFFF"/>
+                </a:solidFill>
+              </a:rPr>
+              <a:t>Agent runtime — Step Functions + Lambda</a:t>
+            </a:r>
+            <a:endParaRPr lang="en-US" sz="880" dirty="0"/>
+          </a:p>
+        </p:txBody>
+      </p:sp>
+      <p:sp>
+        <p:nvSpPr>
+          <p:cNvPr id="35" name="Shape 33"/>
+          <p:cNvSpPr/>
+          <p:nvPr/>
+        </p:nvSpPr>
+        <p:spPr>
+          <a:xfrm>
+            <a:off x="5376672" y="1993392"/>
+            <a:ext cx="274320" cy="274320"/>
+          </a:xfrm>
+          <a:prstGeom prst="ellipse">
+            <a:avLst/>
+          </a:prstGeom>
+          <a:solidFill>
+            <a:srgbClr val="E0A53B"/>
+          </a:solidFill>
+          <a:ln/>
+        </p:spPr>
+      </p:sp>
+      <p:sp>
+        <p:nvSpPr>
+          <p:cNvPr id="36" name="Text 34"/>
+          <p:cNvSpPr/>
+          <p:nvPr/>
+        </p:nvSpPr>
+        <p:spPr>
+          <a:xfrm>
+            <a:off x="5376672" y="1993392"/>
+            <a:ext cx="274320" cy="274320"/>
+          </a:xfrm>
+          <a:prstGeom prst="rect">
+            <a:avLst/>
+          </a:prstGeom>
+          <a:noFill/>
+          <a:ln/>
+        </p:spPr>
+        <p:txBody>
+          <a:bodyPr wrap="square" rtlCol="0" anchor="ctr"/>
+          <a:lstStyle/>
+          <a:p>
+            <a:pPr algn="ctr" indent="0" marL="0">
+              <a:buNone/>
+            </a:pPr>
+            <a:r>
+              <a:rPr lang="en-US" sz="1100" b="1" dirty="0">
+                <a:solidFill>
+                  <a:srgbClr val="3A2A05"/>
+                </a:solidFill>
+                <a:latin typeface="Cambria" pitchFamily="34" charset="0"/>
+                <a:ea typeface="Cambria" pitchFamily="34" charset="-122"/>
+                <a:cs typeface="Cambria" pitchFamily="34" charset="-120"/>
+              </a:rPr>
+              <a:t>3</a:t>
+            </a:r>
+            <a:endParaRPr lang="en-US" sz="1100" dirty="0"/>
+          </a:p>
+        </p:txBody>
+      </p:sp>
+      <p:sp>
+        <p:nvSpPr>
+          <p:cNvPr id="37" name="Shape 35"/>
+          <p:cNvSpPr/>
+          <p:nvPr/>
+        </p:nvSpPr>
+        <p:spPr>
+          <a:xfrm>
+            <a:off x="5468112" y="2724912"/>
+            <a:ext cx="2286000" cy="512064"/>
+          </a:xfrm>
+          <a:prstGeom prst="roundRect">
+            <a:avLst>
+              <a:gd name="adj" fmla="val 7143"/>
+            </a:avLst>
+          </a:prstGeom>
+          <a:solidFill>
+            <a:srgbClr val="1E2761"/>
+          </a:solidFill>
+          <a:ln/>
+          <a:effectLst>
+            <a:outerShdw sx="100000" sy="100000" kx="0" ky="0" algn="bl" rotWithShape="0" blurRad="88900" dist="38100" dir="5400000">
+              <a:srgbClr val="000000">
+                <a:alpha val="15000"/>
+              </a:srgbClr>
+            </a:outerShdw>
+          </a:effectLst>
+        </p:spPr>
+      </p:sp>
+      <p:sp>
+        <p:nvSpPr>
+          <p:cNvPr id="38" name="Text 36"/>
+          <p:cNvSpPr/>
+          <p:nvPr/>
+        </p:nvSpPr>
+        <p:spPr>
+          <a:xfrm>
+            <a:off x="5522976" y="2724912"/>
+            <a:ext cx="2176272" cy="512064"/>
+          </a:xfrm>
+          <a:prstGeom prst="rect">
+            <a:avLst/>
+          </a:prstGeom>
+          <a:noFill/>
+          <a:ln/>
+        </p:spPr>
+        <p:txBody>
+          <a:bodyPr wrap="square" rtlCol="0" anchor="ctr"/>
+          <a:lstStyle/>
+          <a:p>
+            <a:pPr algn="ctr" indent="0" marL="0">
+              <a:buNone/>
+            </a:pPr>
+            <a:r>
+              <a:rPr lang="en-US" sz="880" dirty="0">
+                <a:solidFill>
+                  <a:srgbClr val="FFFFFF"/>
+                </a:solidFill>
+              </a:rPr>
+              <a:t>MCP authorization gateway</a:t>
+            </a:r>
+            <a:endParaRPr lang="en-US" sz="880" dirty="0"/>
+          </a:p>
+        </p:txBody>
+      </p:sp>
+      <p:sp>
+        <p:nvSpPr>
+          <p:cNvPr id="39" name="Shape 37"/>
+          <p:cNvSpPr/>
+          <p:nvPr/>
+        </p:nvSpPr>
+        <p:spPr>
+          <a:xfrm>
+            <a:off x="5376672" y="2651760"/>
+            <a:ext cx="274320" cy="274320"/>
+          </a:xfrm>
+          <a:prstGeom prst="ellipse">
+            <a:avLst/>
+          </a:prstGeom>
+          <a:solidFill>
+            <a:srgbClr val="E0A53B"/>
+          </a:solidFill>
+          <a:ln/>
+        </p:spPr>
+      </p:sp>
+      <p:sp>
+        <p:nvSpPr>
+          <p:cNvPr id="40" name="Text 38"/>
+          <p:cNvSpPr/>
+          <p:nvPr/>
+        </p:nvSpPr>
+        <p:spPr>
+          <a:xfrm>
+            <a:off x="5376672" y="2651760"/>
+            <a:ext cx="274320" cy="274320"/>
+          </a:xfrm>
+          <a:prstGeom prst="rect">
+            <a:avLst/>
+          </a:prstGeom>
+          <a:noFill/>
+          <a:ln/>
+        </p:spPr>
+        <p:txBody>
+          <a:bodyPr wrap="square" rtlCol="0" anchor="ctr"/>
+          <a:lstStyle/>
+          <a:p>
+            <a:pPr algn="ctr" indent="0" marL="0">
+              <a:buNone/>
+            </a:pPr>
+            <a:r>
+              <a:rPr lang="en-US" sz="1100" b="1" dirty="0">
+                <a:solidFill>
+                  <a:srgbClr val="3A2A05"/>
+                </a:solidFill>
+                <a:latin typeface="Cambria" pitchFamily="34" charset="0"/>
+                <a:ea typeface="Cambria" pitchFamily="34" charset="-122"/>
+                <a:cs typeface="Cambria" pitchFamily="34" charset="-120"/>
+              </a:rPr>
+              <a:t>4</a:t>
+            </a:r>
+            <a:endParaRPr lang="en-US" sz="1100" dirty="0"/>
+          </a:p>
+        </p:txBody>
+      </p:sp>
+      <p:sp>
+        <p:nvSpPr>
+          <p:cNvPr id="41" name="Shape 39"/>
+          <p:cNvSpPr/>
+          <p:nvPr/>
+        </p:nvSpPr>
+        <p:spPr>
+          <a:xfrm>
+            <a:off x="5468112" y="3383280"/>
+            <a:ext cx="2286000" cy="512064"/>
+          </a:xfrm>
+          <a:prstGeom prst="roundRect">
+            <a:avLst>
+              <a:gd name="adj" fmla="val 7143"/>
+            </a:avLst>
+          </a:prstGeom>
+          <a:solidFill>
+            <a:srgbClr val="2A376E"/>
+          </a:solidFill>
+          <a:ln/>
+          <a:effectLst>
+            <a:outerShdw sx="100000" sy="100000" kx="0" ky="0" algn="bl" rotWithShape="0" blurRad="88900" dist="38100" dir="5400000">
+              <a:srgbClr val="000000">
+                <a:alpha val="15000"/>
+              </a:srgbClr>
+            </a:outerShdw>
+          </a:effectLst>
+        </p:spPr>
+      </p:sp>
+      <p:sp>
+        <p:nvSpPr>
+          <p:cNvPr id="42" name="Text 40"/>
+          <p:cNvSpPr/>
+          <p:nvPr/>
+        </p:nvSpPr>
+        <p:spPr>
+          <a:xfrm>
+            <a:off x="5522976" y="3383280"/>
+            <a:ext cx="2176272" cy="512064"/>
+          </a:xfrm>
+          <a:prstGeom prst="rect">
+            <a:avLst/>
+          </a:prstGeom>
+          <a:noFill/>
+          <a:ln/>
+        </p:spPr>
+        <p:txBody>
+          <a:bodyPr wrap="square" rtlCol="0" anchor="ctr"/>
+          <a:lstStyle/>
+          <a:p>
+            <a:pPr algn="ctr" indent="0" marL="0">
+              <a:buNone/>
+            </a:pPr>
+            <a:r>
+              <a:rPr lang="en-US" sz="880" dirty="0">
+                <a:solidFill>
+                  <a:srgbClr val="FFFFFF"/>
+                </a:solidFill>
+              </a:rPr>
+              <a:t>SQS queue + DLQ · HITL gate</a:t>
+            </a:r>
+            <a:endParaRPr lang="en-US" sz="880" dirty="0"/>
+          </a:p>
+        </p:txBody>
+      </p:sp>
+      <p:sp>
+        <p:nvSpPr>
+          <p:cNvPr id="43" name="Shape 41"/>
+          <p:cNvSpPr/>
+          <p:nvPr/>
+        </p:nvSpPr>
+        <p:spPr>
+          <a:xfrm>
+            <a:off x="5376672" y="3310128"/>
+            <a:ext cx="274320" cy="274320"/>
+          </a:xfrm>
+          <a:prstGeom prst="ellipse">
+            <a:avLst/>
+          </a:prstGeom>
+          <a:solidFill>
+            <a:srgbClr val="E0A53B"/>
+          </a:solidFill>
+          <a:ln/>
+        </p:spPr>
+      </p:sp>
+      <p:sp>
+        <p:nvSpPr>
+          <p:cNvPr id="44" name="Text 42"/>
+          <p:cNvSpPr/>
+          <p:nvPr/>
+        </p:nvSpPr>
+        <p:spPr>
+          <a:xfrm>
+            <a:off x="5376672" y="3310128"/>
+            <a:ext cx="274320" cy="274320"/>
+          </a:xfrm>
+          <a:prstGeom prst="rect">
+            <a:avLst/>
+          </a:prstGeom>
+          <a:noFill/>
+          <a:ln/>
+        </p:spPr>
+        <p:txBody>
+          <a:bodyPr wrap="square" rtlCol="0" anchor="ctr"/>
+          <a:lstStyle/>
+          <a:p>
+            <a:pPr algn="ctr" indent="0" marL="0">
+              <a:buNone/>
+            </a:pPr>
+            <a:r>
+              <a:rPr lang="en-US" sz="1100" b="1" dirty="0">
+                <a:solidFill>
+                  <a:srgbClr val="3A2A05"/>
+                </a:solidFill>
+                <a:latin typeface="Cambria" pitchFamily="34" charset="0"/>
+                <a:ea typeface="Cambria" pitchFamily="34" charset="-122"/>
+                <a:cs typeface="Cambria" pitchFamily="34" charset="-120"/>
+              </a:rPr>
+              <a:t>6</a:t>
+            </a:r>
+            <a:endParaRPr lang="en-US" sz="1100" dirty="0"/>
+          </a:p>
+        </p:txBody>
+      </p:sp>
+      <p:sp>
+        <p:nvSpPr>
+          <p:cNvPr id="45" name="Shape 43"/>
+          <p:cNvSpPr/>
+          <p:nvPr/>
+        </p:nvSpPr>
+        <p:spPr>
+          <a:xfrm>
+            <a:off x="7973568" y="1773936"/>
+            <a:ext cx="3657600" cy="2852928"/>
+          </a:xfrm>
+          <a:prstGeom prst="roundRect">
+            <a:avLst>
+              <a:gd name="adj" fmla="val 1603"/>
+            </a:avLst>
+          </a:prstGeom>
+          <a:solidFill>
+            <a:srgbClr val="F4F7FE"/>
+          </a:solidFill>
+          <a:ln w="12700">
+            <a:solidFill>
+              <a:srgbClr val="C2D0EC"/>
+            </a:solidFill>
+            <a:prstDash val="solid"/>
+          </a:ln>
+        </p:spPr>
+      </p:sp>
+      <p:sp>
+        <p:nvSpPr>
+          <p:cNvPr id="46" name="Text 44"/>
+          <p:cNvSpPr/>
+          <p:nvPr/>
+        </p:nvSpPr>
+        <p:spPr>
+          <a:xfrm>
+            <a:off x="8083296" y="1819656"/>
+            <a:ext cx="3419856" cy="201168"/>
+          </a:xfrm>
+          <a:prstGeom prst="rect">
+            <a:avLst/>
+          </a:prstGeom>
+          <a:noFill/>
+          <a:ln/>
+        </p:spPr>
+        <p:txBody>
+          <a:bodyPr wrap="square" rtlCol="0" anchor="ctr"/>
+          <a:lstStyle/>
+          <a:p>
+            <a:pPr indent="0" marL="0">
+              <a:buNone/>
+            </a:pPr>
+            <a:r>
+              <a:rPr lang="en-US" sz="850" b="1" spc="100" kern="0" dirty="0">
+                <a:solidFill>
+                  <a:srgbClr val="1E2761"/>
+                </a:solidFill>
+              </a:rPr>
+              <a:t>MODEL LAYER — VPC ENDPOINT</a:t>
+            </a:r>
+            <a:endParaRPr lang="en-US" sz="850" dirty="0"/>
+          </a:p>
+        </p:txBody>
+      </p:sp>
+      <p:sp>
+        <p:nvSpPr>
+          <p:cNvPr id="47" name="Shape 45"/>
+          <p:cNvSpPr/>
+          <p:nvPr/>
+        </p:nvSpPr>
+        <p:spPr>
+          <a:xfrm>
+            <a:off x="8092440" y="2048256"/>
+            <a:ext cx="3419856" cy="512064"/>
+          </a:xfrm>
+          <a:prstGeom prst="roundRect">
+            <a:avLst>
+              <a:gd name="adj" fmla="val 7143"/>
+            </a:avLst>
+          </a:prstGeom>
+          <a:solidFill>
+            <a:srgbClr val="1E2761"/>
+          </a:solidFill>
+          <a:ln/>
+          <a:effectLst>
+            <a:outerShdw sx="100000" sy="100000" kx="0" ky="0" algn="bl" rotWithShape="0" blurRad="88900" dist="38100" dir="5400000">
+              <a:srgbClr val="000000">
+                <a:alpha val="15000"/>
+              </a:srgbClr>
+            </a:outerShdw>
+          </a:effectLst>
+        </p:spPr>
+      </p:sp>
+      <p:sp>
+        <p:nvSpPr>
+          <p:cNvPr id="48" name="Text 46"/>
+          <p:cNvSpPr/>
+          <p:nvPr/>
+        </p:nvSpPr>
+        <p:spPr>
+          <a:xfrm>
+            <a:off x="8147304" y="2048256"/>
+            <a:ext cx="3310128" cy="512064"/>
+          </a:xfrm>
+          <a:prstGeom prst="rect">
+            <a:avLst/>
+          </a:prstGeom>
+          <a:noFill/>
+          <a:ln/>
+        </p:spPr>
+        <p:txBody>
+          <a:bodyPr wrap="square" rtlCol="0" anchor="ctr"/>
+          <a:lstStyle/>
+          <a:p>
+            <a:pPr algn="ctr" indent="0" marL="0">
+              <a:buNone/>
+            </a:pPr>
+            <a:r>
+              <a:rPr lang="en-US" sz="880" dirty="0">
+                <a:solidFill>
+                  <a:srgbClr val="FFFFFF"/>
+                </a:solidFill>
+              </a:rPr>
+              <a:t>Amazon Bedrock — Claude Sonnet + Haiku</a:t>
+            </a:r>
+            <a:endParaRPr lang="en-US" sz="880" dirty="0"/>
+          </a:p>
+        </p:txBody>
+      </p:sp>
+      <p:sp>
+        <p:nvSpPr>
+          <p:cNvPr id="49" name="Shape 47"/>
+          <p:cNvSpPr/>
+          <p:nvPr/>
+        </p:nvSpPr>
+        <p:spPr>
+          <a:xfrm>
+            <a:off x="8001000" y="1975104"/>
+            <a:ext cx="274320" cy="274320"/>
+          </a:xfrm>
+          <a:prstGeom prst="ellipse">
+            <a:avLst/>
+          </a:prstGeom>
+          <a:solidFill>
+            <a:srgbClr val="E0A53B"/>
+          </a:solidFill>
+          <a:ln/>
+        </p:spPr>
+      </p:sp>
+      <p:sp>
+        <p:nvSpPr>
+          <p:cNvPr id="50" name="Text 48"/>
+          <p:cNvSpPr/>
+          <p:nvPr/>
+        </p:nvSpPr>
+        <p:spPr>
+          <a:xfrm>
+            <a:off x="8001000" y="1975104"/>
+            <a:ext cx="274320" cy="274320"/>
+          </a:xfrm>
+          <a:prstGeom prst="rect">
+            <a:avLst/>
+          </a:prstGeom>
+          <a:noFill/>
+          <a:ln/>
+        </p:spPr>
+        <p:txBody>
+          <a:bodyPr wrap="square" rtlCol="0" anchor="ctr"/>
+          <a:lstStyle/>
+          <a:p>
+            <a:pPr algn="ctr" indent="0" marL="0">
+              <a:buNone/>
+            </a:pPr>
+            <a:r>
+              <a:rPr lang="en-US" sz="1100" b="1" dirty="0">
+                <a:solidFill>
+                  <a:srgbClr val="3A2A05"/>
+                </a:solidFill>
+                <a:latin typeface="Cambria" pitchFamily="34" charset="0"/>
+                <a:ea typeface="Cambria" pitchFamily="34" charset="-122"/>
+                <a:cs typeface="Cambria" pitchFamily="34" charset="-120"/>
+              </a:rPr>
+              <a:t>5</a:t>
+            </a:r>
+            <a:endParaRPr lang="en-US" sz="1100" dirty="0"/>
+          </a:p>
+        </p:txBody>
+      </p:sp>
+      <p:sp>
+        <p:nvSpPr>
+          <p:cNvPr id="51" name="Shape 49"/>
+          <p:cNvSpPr/>
+          <p:nvPr/>
+        </p:nvSpPr>
+        <p:spPr>
+          <a:xfrm>
+            <a:off x="8092440" y="2633472"/>
+            <a:ext cx="3419856" cy="512064"/>
+          </a:xfrm>
+          <a:prstGeom prst="roundRect">
+            <a:avLst>
+              <a:gd name="adj" fmla="val 7143"/>
+            </a:avLst>
+          </a:prstGeom>
+          <a:solidFill>
+            <a:srgbClr val="2A376E"/>
+          </a:solidFill>
+          <a:ln/>
+          <a:effectLst>
+            <a:outerShdw sx="100000" sy="100000" kx="0" ky="0" algn="bl" rotWithShape="0" blurRad="88900" dist="38100" dir="5400000">
+              <a:srgbClr val="000000">
+                <a:alpha val="15000"/>
+              </a:srgbClr>
+            </a:outerShdw>
+          </a:effectLst>
+        </p:spPr>
+      </p:sp>
+      <p:sp>
+        <p:nvSpPr>
+          <p:cNvPr id="52" name="Text 50"/>
+          <p:cNvSpPr/>
+          <p:nvPr/>
+        </p:nvSpPr>
+        <p:spPr>
+          <a:xfrm>
+            <a:off x="8147304" y="2633472"/>
+            <a:ext cx="3310128" cy="512064"/>
+          </a:xfrm>
+          <a:prstGeom prst="rect">
+            <a:avLst/>
+          </a:prstGeom>
+          <a:noFill/>
+          <a:ln/>
+        </p:spPr>
+        <p:txBody>
+          <a:bodyPr wrap="square" rtlCol="0" anchor="ctr"/>
+          <a:lstStyle/>
+          <a:p>
+            <a:pPr algn="ctr" indent="0" marL="0">
+              <a:buNone/>
+            </a:pPr>
+            <a:r>
+              <a:rPr lang="en-US" sz="880" dirty="0">
+                <a:solidFill>
+                  <a:srgbClr val="FFFFFF"/>
+                </a:solidFill>
+              </a:rPr>
+              <a:t>Bedrock Guardrails — PII &amp; content (mandatory)</a:t>
+            </a:r>
+            <a:endParaRPr lang="en-US" sz="880" dirty="0"/>
+          </a:p>
+        </p:txBody>
+      </p:sp>
+      <p:sp>
+        <p:nvSpPr>
+          <p:cNvPr id="53" name="Text 51"/>
+          <p:cNvSpPr/>
+          <p:nvPr/>
+        </p:nvSpPr>
+        <p:spPr>
+          <a:xfrm>
+            <a:off x="8083296" y="3218688"/>
+            <a:ext cx="3419856" cy="201168"/>
+          </a:xfrm>
+          <a:prstGeom prst="rect">
+            <a:avLst/>
+          </a:prstGeom>
+          <a:noFill/>
+          <a:ln/>
+        </p:spPr>
+        <p:txBody>
+          <a:bodyPr wrap="square" rtlCol="0" anchor="ctr"/>
+          <a:lstStyle/>
+          <a:p>
+            <a:pPr indent="0" marL="0">
+              <a:buNone/>
+            </a:pPr>
+            <a:r>
+              <a:rPr lang="en-US" sz="850" b="1" spc="100" kern="0" dirty="0">
+                <a:solidFill>
+                  <a:srgbClr val="1E2761"/>
+                </a:solidFill>
+              </a:rPr>
+              <a:t>DATA TIER — KMS CMK per data class</a:t>
+            </a:r>
+            <a:endParaRPr lang="en-US" sz="850" dirty="0"/>
+          </a:p>
+        </p:txBody>
+      </p:sp>
+      <p:sp>
+        <p:nvSpPr>
+          <p:cNvPr id="54" name="Shape 52"/>
+          <p:cNvSpPr/>
+          <p:nvPr/>
+        </p:nvSpPr>
+        <p:spPr>
+          <a:xfrm>
+            <a:off x="8092440" y="3438144"/>
+            <a:ext cx="3419856" cy="512064"/>
+          </a:xfrm>
+          <a:prstGeom prst="roundRect">
+            <a:avLst>
+              <a:gd name="adj" fmla="val 7143"/>
+            </a:avLst>
+          </a:prstGeom>
+          <a:solidFill>
+            <a:srgbClr val="2A376E"/>
+          </a:solidFill>
+          <a:ln/>
+          <a:effectLst>
+            <a:outerShdw sx="100000" sy="100000" kx="0" ky="0" algn="bl" rotWithShape="0" blurRad="88900" dist="38100" dir="5400000">
+              <a:srgbClr val="000000">
+                <a:alpha val="15000"/>
+              </a:srgbClr>
+            </a:outerShdw>
+          </a:effectLst>
+        </p:spPr>
+      </p:sp>
+      <p:sp>
+        <p:nvSpPr>
+          <p:cNvPr id="55" name="Text 53"/>
+          <p:cNvSpPr/>
+          <p:nvPr/>
+        </p:nvSpPr>
+        <p:spPr>
+          <a:xfrm>
+            <a:off x="8147304" y="3438144"/>
+            <a:ext cx="3310128" cy="512064"/>
+          </a:xfrm>
+          <a:prstGeom prst="rect">
+            <a:avLst/>
+          </a:prstGeom>
+          <a:noFill/>
+          <a:ln/>
+        </p:spPr>
+        <p:txBody>
+          <a:bodyPr wrap="square" rtlCol="0" anchor="ctr"/>
+          <a:lstStyle/>
+          <a:p>
+            <a:pPr algn="ctr" indent="0" marL="0">
+              <a:buNone/>
+            </a:pPr>
+            <a:r>
+              <a:rPr lang="en-US" sz="880" dirty="0">
+                <a:solidFill>
+                  <a:srgbClr val="FFFFFF"/>
+                </a:solidFill>
+              </a:rPr>
+              <a:t>DynamoDB — append-only audit</a:t>
+            </a:r>
+            <a:endParaRPr lang="en-US" sz="880" dirty="0"/>
+          </a:p>
+        </p:txBody>
+      </p:sp>
+      <p:sp>
+        <p:nvSpPr>
+          <p:cNvPr id="56" name="Shape 54"/>
+          <p:cNvSpPr/>
+          <p:nvPr/>
+        </p:nvSpPr>
+        <p:spPr>
+          <a:xfrm>
+            <a:off x="8001000" y="3364992"/>
+            <a:ext cx="274320" cy="274320"/>
+          </a:xfrm>
+          <a:prstGeom prst="ellipse">
+            <a:avLst/>
+          </a:prstGeom>
+          <a:solidFill>
+            <a:srgbClr val="E0A53B"/>
+          </a:solidFill>
+          <a:ln/>
+        </p:spPr>
+      </p:sp>
+      <p:sp>
+        <p:nvSpPr>
+          <p:cNvPr id="57" name="Text 55"/>
+          <p:cNvSpPr/>
+          <p:nvPr/>
+        </p:nvSpPr>
+        <p:spPr>
+          <a:xfrm>
+            <a:off x="8001000" y="3364992"/>
+            <a:ext cx="274320" cy="274320"/>
+          </a:xfrm>
+          <a:prstGeom prst="rect">
+            <a:avLst/>
+          </a:prstGeom>
+          <a:noFill/>
+          <a:ln/>
+        </p:spPr>
+        <p:txBody>
+          <a:bodyPr wrap="square" rtlCol="0" anchor="ctr"/>
+          <a:lstStyle/>
+          <a:p>
+            <a:pPr algn="ctr" indent="0" marL="0">
+              <a:buNone/>
+            </a:pPr>
+            <a:r>
+              <a:rPr lang="en-US" sz="1100" b="1" dirty="0">
+                <a:solidFill>
+                  <a:srgbClr val="3A2A05"/>
+                </a:solidFill>
+                <a:latin typeface="Cambria" pitchFamily="34" charset="0"/>
+                <a:ea typeface="Cambria" pitchFamily="34" charset="-122"/>
+                <a:cs typeface="Cambria" pitchFamily="34" charset="-120"/>
+              </a:rPr>
+              <a:t>8</a:t>
+            </a:r>
+            <a:endParaRPr lang="en-US" sz="1100" dirty="0"/>
+          </a:p>
+        </p:txBody>
+      </p:sp>
+      <p:sp>
+        <p:nvSpPr>
+          <p:cNvPr id="58" name="Shape 56"/>
+          <p:cNvSpPr/>
+          <p:nvPr/>
+        </p:nvSpPr>
+        <p:spPr>
+          <a:xfrm>
+            <a:off x="8092440" y="4023360"/>
+            <a:ext cx="3419856" cy="512064"/>
+          </a:xfrm>
+          <a:prstGeom prst="roundRect">
+            <a:avLst>
+              <a:gd name="adj" fmla="val 7143"/>
+            </a:avLst>
+          </a:prstGeom>
+          <a:solidFill>
+            <a:srgbClr val="2A376E"/>
+          </a:solidFill>
+          <a:ln/>
+          <a:effectLst>
+            <a:outerShdw sx="100000" sy="100000" kx="0" ky="0" algn="bl" rotWithShape="0" blurRad="88900" dist="38100" dir="5400000">
+              <a:srgbClr val="000000">
+                <a:alpha val="15000"/>
+              </a:srgbClr>
+            </a:outerShdw>
+          </a:effectLst>
+        </p:spPr>
+      </p:sp>
+      <p:sp>
+        <p:nvSpPr>
+          <p:cNvPr id="59" name="Text 57"/>
+          <p:cNvSpPr/>
+          <p:nvPr/>
+        </p:nvSpPr>
+        <p:spPr>
+          <a:xfrm>
+            <a:off x="8147304" y="4023360"/>
+            <a:ext cx="3310128" cy="512064"/>
+          </a:xfrm>
+          <a:prstGeom prst="rect">
+            <a:avLst/>
+          </a:prstGeom>
+          <a:noFill/>
+          <a:ln/>
+        </p:spPr>
+        <p:txBody>
+          <a:bodyPr wrap="square" rtlCol="0" anchor="ctr"/>
+          <a:lstStyle/>
+          <a:p>
+            <a:pPr algn="ctr" indent="0" marL="0">
+              <a:buNone/>
+            </a:pPr>
+            <a:r>
+              <a:rPr lang="en-US" sz="880" dirty="0">
+                <a:solidFill>
+                  <a:srgbClr val="FFFFFF"/>
+                </a:solidFill>
+              </a:rPr>
+              <a:t>S3 Object Lock (WORM) · state · Secrets</a:t>
+            </a:r>
+            <a:endParaRPr lang="en-US" sz="880" dirty="0"/>
+          </a:p>
+        </p:txBody>
+      </p:sp>
+      <p:sp>
+        <p:nvSpPr>
+          <p:cNvPr id="60" name="Shape 58"/>
+          <p:cNvSpPr/>
+          <p:nvPr/>
+        </p:nvSpPr>
+        <p:spPr>
+          <a:xfrm>
+            <a:off x="8001000" y="3950208"/>
+            <a:ext cx="274320" cy="274320"/>
+          </a:xfrm>
+          <a:prstGeom prst="ellipse">
+            <a:avLst/>
+          </a:prstGeom>
+          <a:solidFill>
+            <a:srgbClr val="E0A53B"/>
+          </a:solidFill>
+          <a:ln/>
+        </p:spPr>
+      </p:sp>
+      <p:sp>
+        <p:nvSpPr>
+          <p:cNvPr id="61" name="Text 59"/>
+          <p:cNvSpPr/>
+          <p:nvPr/>
+        </p:nvSpPr>
+        <p:spPr>
+          <a:xfrm>
+            <a:off x="8001000" y="3950208"/>
+            <a:ext cx="274320" cy="274320"/>
+          </a:xfrm>
+          <a:prstGeom prst="rect">
+            <a:avLst/>
+          </a:prstGeom>
+          <a:noFill/>
+          <a:ln/>
+        </p:spPr>
+        <p:txBody>
+          <a:bodyPr wrap="square" rtlCol="0" anchor="ctr"/>
+          <a:lstStyle/>
+          <a:p>
+            <a:pPr algn="ctr" indent="0" marL="0">
+              <a:buNone/>
+            </a:pPr>
+            <a:r>
+              <a:rPr lang="en-US" sz="1100" b="1" dirty="0">
+                <a:solidFill>
+                  <a:srgbClr val="3A2A05"/>
+                </a:solidFill>
+                <a:latin typeface="Cambria" pitchFamily="34" charset="0"/>
+                <a:ea typeface="Cambria" pitchFamily="34" charset="-122"/>
+                <a:cs typeface="Cambria" pitchFamily="34" charset="-120"/>
+              </a:rPr>
+              <a:t>7</a:t>
+            </a:r>
+            <a:endParaRPr lang="en-US" sz="1100" dirty="0"/>
+          </a:p>
+        </p:txBody>
+      </p:sp>
+      <p:sp>
+        <p:nvSpPr>
+          <p:cNvPr id="62" name="Shape 60"/>
+          <p:cNvSpPr/>
+          <p:nvPr/>
+        </p:nvSpPr>
+        <p:spPr>
+          <a:xfrm>
+            <a:off x="2340864" y="3520440"/>
+            <a:ext cx="402336" cy="0"/>
+          </a:xfrm>
+          <a:prstGeom prst="line">
+            <a:avLst/>
+          </a:prstGeom>
+          <a:noFill/>
+          <a:ln w="19050">
+            <a:solidFill>
+              <a:srgbClr val="8FA0C8"/>
+            </a:solidFill>
+            <a:prstDash val="solid"/>
+          </a:ln>
+        </p:spPr>
+      </p:sp>
+      <p:sp>
+        <p:nvSpPr>
+          <p:cNvPr id="63" name="Shape 61"/>
+          <p:cNvSpPr/>
+          <p:nvPr/>
+        </p:nvSpPr>
+        <p:spPr>
+          <a:xfrm>
+            <a:off x="5138928" y="2322576"/>
+            <a:ext cx="329184" cy="0"/>
+          </a:xfrm>
+          <a:prstGeom prst="line">
+            <a:avLst/>
+          </a:prstGeom>
+          <a:noFill/>
+          <a:ln w="19050">
+            <a:solidFill>
+              <a:srgbClr val="8FA0C8"/>
+            </a:solidFill>
+            <a:prstDash val="solid"/>
+          </a:ln>
+        </p:spPr>
+      </p:sp>
+      <p:sp>
+        <p:nvSpPr>
+          <p:cNvPr id="64" name="Shape 62"/>
+          <p:cNvSpPr/>
+          <p:nvPr/>
+        </p:nvSpPr>
+        <p:spPr>
+          <a:xfrm>
+            <a:off x="7754112" y="2304288"/>
+            <a:ext cx="338328" cy="0"/>
+          </a:xfrm>
+          <a:prstGeom prst="line">
+            <a:avLst/>
+          </a:prstGeom>
+          <a:noFill/>
+          <a:ln w="19050">
+            <a:solidFill>
+              <a:srgbClr val="8FA0C8"/>
+            </a:solidFill>
+            <a:prstDash val="solid"/>
+          </a:ln>
+        </p:spPr>
+      </p:sp>
+      <p:sp>
+        <p:nvSpPr>
+          <p:cNvPr id="65" name="Shape 63"/>
+          <p:cNvSpPr/>
+          <p:nvPr/>
+        </p:nvSpPr>
+        <p:spPr>
+          <a:xfrm>
+            <a:off x="6611112" y="3383280"/>
+            <a:ext cx="0" cy="228600"/>
+          </a:xfrm>
+          <a:prstGeom prst="line">
+            <a:avLst/>
+          </a:prstGeom>
+          <a:noFill/>
+          <a:ln w="19050">
+            <a:solidFill>
+              <a:srgbClr val="8FA0C8"/>
+            </a:solidFill>
+            <a:prstDash val="solid"/>
+          </a:ln>
+        </p:spPr>
+      </p:sp>
+      <p:sp>
+        <p:nvSpPr>
+          <p:cNvPr id="66" name="Shape 64"/>
+          <p:cNvSpPr/>
+          <p:nvPr/>
+        </p:nvSpPr>
+        <p:spPr>
+          <a:xfrm>
+            <a:off x="457200" y="4828032"/>
+            <a:ext cx="11274552" cy="365760"/>
+          </a:xfrm>
+          <a:prstGeom prst="roundRect">
+            <a:avLst>
+              <a:gd name="adj" fmla="val 10000"/>
+            </a:avLst>
+          </a:prstGeom>
+          <a:solidFill>
             <a:srgbClr val="EEF2FB"/>
           </a:solidFill>
           <a:ln/>
@@ -4760,14 +6205,14 @@
       </p:sp>
       <p:sp>
         <p:nvSpPr>
-          <p:cNvPr id="19" name="Text 17"/>
-          <p:cNvSpPr/>
-          <p:nvPr/>
-        </p:nvSpPr>
-        <p:spPr>
-          <a:xfrm>
-            <a:off x="868680" y="3767328"/>
-            <a:ext cx="10424160" cy="420624"/>
+          <p:cNvPr id="67" name="Text 65"/>
+          <p:cNvSpPr/>
+          <p:nvPr/>
+        </p:nvSpPr>
+        <p:spPr>
+          <a:xfrm>
+            <a:off x="640080" y="4828032"/>
+            <a:ext cx="10972800" cy="365760"/>
           </a:xfrm>
           <a:prstGeom prst="rect">
             <a:avLst/>
@@ -4783,7 +6228,7 @@
               <a:buNone/>
             </a:pPr>
             <a:r>
-              <a:rPr lang="en-US" sz="1000" b="1" dirty="0">
+              <a:rPr lang="en-US" sz="930" b="1" dirty="0">
                 <a:solidFill>
                   <a:srgbClr val="1E2761"/>
                 </a:solidFill>
@@ -4794,27 +6239,27 @@
               <a:buNone/>
             </a:pPr>
             <a:r>
-              <a:rPr lang="en-US" sz="1000" dirty="0">
+              <a:rPr lang="en-US" sz="930" dirty="0">
                 <a:solidFill>
                   <a:srgbClr val="1B2440"/>
                 </a:solidFill>
               </a:rPr>
-              <a:t>KMS (CMK per data class) · IAM least-privilege roles · CloudWatch · CloudTrail · X-Ray · GuardDuty · Security Hub + Config · data-class isolation (CJI/FTI/PHI/EDU/public)</a:t>
-            </a:r>
-            <a:endParaRPr lang="en-US" sz="1000" dirty="0"/>
-          </a:p>
-        </p:txBody>
-      </p:sp>
-      <p:sp>
-        <p:nvSpPr>
-          <p:cNvPr id="20" name="Text 18"/>
-          <p:cNvSpPr/>
-          <p:nvPr/>
-        </p:nvSpPr>
-        <p:spPr>
-          <a:xfrm>
-            <a:off x="640080" y="4315968"/>
-            <a:ext cx="3657600" cy="274320"/>
+              <a:t>KMS (CMK per data class) · IAM least-privilege · CloudWatch · CloudTrail · X-Ray · GuardDuty · Security Hub + Config · data-class isolation (CJI/FTI/PHI/EDU/public)</a:t>
+            </a:r>
+            <a:endParaRPr lang="en-US" sz="930" dirty="0"/>
+          </a:p>
+        </p:txBody>
+      </p:sp>
+      <p:sp>
+        <p:nvSpPr>
+          <p:cNvPr id="68" name="Text 66"/>
+          <p:cNvSpPr/>
+          <p:nvPr/>
+        </p:nvSpPr>
+        <p:spPr>
+          <a:xfrm>
+            <a:off x="457200" y="5303520"/>
+            <a:ext cx="3657600" cy="219456"/>
           </a:xfrm>
           <a:prstGeom prst="rect">
             <a:avLst/>
@@ -4830,27 +6275,27 @@
               <a:buNone/>
             </a:pPr>
             <a:r>
-              <a:rPr lang="en-US" sz="1200" b="1" spc="100" kern="0" dirty="0">
+              <a:rPr lang="en-US" sz="1100" b="1" spc="100" kern="0" dirty="0">
                 <a:solidFill>
                   <a:srgbClr val="2E8BC0"/>
                 </a:solidFill>
               </a:rPr>
               <a:t>TRAFFIC FLOW</a:t>
             </a:r>
-            <a:endParaRPr lang="en-US" sz="1200" dirty="0"/>
-          </a:p>
-        </p:txBody>
-      </p:sp>
-      <p:sp>
-        <p:nvSpPr>
-          <p:cNvPr id="21" name="Text 19"/>
-          <p:cNvSpPr/>
-          <p:nvPr/>
-        </p:nvSpPr>
-        <p:spPr>
-          <a:xfrm>
-            <a:off x="640080" y="4617720"/>
-            <a:ext cx="10881360" cy="1691640"/>
+            <a:endParaRPr lang="en-US" sz="1100" dirty="0"/>
+          </a:p>
+        </p:txBody>
+      </p:sp>
+      <p:sp>
+        <p:nvSpPr>
+          <p:cNvPr id="69" name="Text 67"/>
+          <p:cNvSpPr/>
+          <p:nvPr/>
+        </p:nvSpPr>
+        <p:spPr>
+          <a:xfrm>
+            <a:off x="457200" y="5541264"/>
+            <a:ext cx="5623560" cy="1234440"/>
           </a:xfrm>
           <a:prstGeom prst="rect">
             <a:avLst/>
@@ -4869,14 +6314,14 @@
               <a:buNone/>
             </a:pPr>
             <a:r>
-              <a:rPr lang="en-US" sz="1050" dirty="0">
+              <a:rPr lang="en-US" sz="930" dirty="0">
                 <a:solidFill>
                   <a:srgbClr val="1B2440"/>
                 </a:solidFill>
               </a:rPr>
-              <a:t>1  Resident/staff sign in at the agency IdP (SAML/OIDC, MFA). Amazon Cognito brokers the assertion and issues a short-lived JWT — no credentials are stored in AWS.</a:t>
-            </a:r>
-            <a:endParaRPr lang="en-US" sz="1050" dirty="0"/>
+              <a:t>1  Resident/staff sign in at the agency IdP (SAML/OIDC, MFA). Amazon Cognito …</a:t>
+            </a:r>
+            <a:endParaRPr lang="en-US" sz="930" dirty="0"/>
           </a:p>
           <a:p>
             <a:pPr indent="0" marL="0">
@@ -4886,14 +6331,14 @@
               <a:buNone/>
             </a:pPr>
             <a:r>
-              <a:rPr lang="en-US" sz="1050" dirty="0">
+              <a:rPr lang="en-US" sz="930" dirty="0">
                 <a:solidFill>
                   <a:srgbClr val="1B2440"/>
                 </a:solidFill>
               </a:rPr>
-              <a:t>2  CloudFront + AWS WAF inspect, filter and rate-limit the request; API Gateway's Cognito JWT authorizer validates the token before any request reaches the app.</a:t>
-            </a:r>
-            <a:endParaRPr lang="en-US" sz="1050" dirty="0"/>
+              <a:t>2  CloudFront + AWS WAF inspect, filter and rate-limit the request; API Gatew…</a:t>
+            </a:r>
+            <a:endParaRPr lang="en-US" sz="930" dirty="0"/>
           </a:p>
           <a:p>
             <a:pPr indent="0" marL="0">
@@ -4903,14 +6348,14 @@
               <a:buNone/>
             </a:pPr>
             <a:r>
-              <a:rPr lang="en-US" sz="1050" dirty="0">
+              <a:rPr lang="en-US" sz="930" dirty="0">
                 <a:solidFill>
                   <a:srgbClr val="1B2440"/>
                 </a:solidFill>
               </a:rPr>
-              <a:t>3  The MCP gateway re-validates the JWT and its custom:slg_role claim and authorizes each tool call — agent grant ∩ user entitlement (deny-by-default).</a:t>
-            </a:r>
-            <a:endParaRPr lang="en-US" sz="1050" dirty="0"/>
+              <a:t>3  The MCP gateway re-validates the JWT and its custom:slg_role claim and aut…</a:t>
+            </a:r>
+            <a:endParaRPr lang="en-US" sz="930" dirty="0"/>
           </a:p>
           <a:p>
             <a:pPr indent="0" marL="0">
@@ -4920,15 +6365,37 @@
               <a:buNone/>
             </a:pPr>
             <a:r>
-              <a:rPr lang="en-US" sz="1050" dirty="0">
+              <a:rPr lang="en-US" sz="930" dirty="0">
                 <a:solidFill>
                   <a:srgbClr val="1B2440"/>
                 </a:solidFill>
               </a:rPr>
-              <a:t>4  For each authorized call the gateway mints a short-lived, tool-scoped token (AgentCore Identity / STS) — no standing service accounts; the JWT subject stays attributable.</a:t>
-            </a:r>
-            <a:endParaRPr lang="en-US" sz="1050" dirty="0"/>
-          </a:p>
+              <a:t>4  For each authorized call the gateway mints a short-lived, tool-scoped toke…</a:t>
+            </a:r>
+            <a:endParaRPr lang="en-US" sz="930" dirty="0"/>
+          </a:p>
+        </p:txBody>
+      </p:sp>
+      <p:sp>
+        <p:nvSpPr>
+          <p:cNvPr id="70" name="Text 68"/>
+          <p:cNvSpPr/>
+          <p:nvPr/>
+        </p:nvSpPr>
+        <p:spPr>
+          <a:xfrm>
+            <a:off x="6172200" y="5541264"/>
+            <a:ext cx="5577840" cy="1234440"/>
+          </a:xfrm>
+          <a:prstGeom prst="rect">
+            <a:avLst/>
+          </a:prstGeom>
+          <a:noFill/>
+          <a:ln/>
+        </p:spPr>
+        <p:txBody>
+          <a:bodyPr wrap="square" rtlCol="0" anchor="ctr"/>
+          <a:lstStyle/>
           <a:p>
             <a:pPr indent="0" marL="0">
               <a:spcAft>
@@ -4937,14 +6404,14 @@
               <a:buNone/>
             </a:pPr>
             <a:r>
-              <a:rPr lang="en-US" sz="1050" dirty="0">
+              <a:rPr lang="en-US" sz="930" dirty="0">
                 <a:solidFill>
                   <a:srgbClr val="1B2440"/>
                 </a:solidFill>
               </a:rPr>
-              <a:t>5  Model calls stay inside AWS via a Bedrock VPC endpoint; Guardrails filter PII/content on every call. Grounding, accessibility and PII checks run before a human sees output.</a:t>
-            </a:r>
-            <a:endParaRPr lang="en-US" sz="1050" dirty="0"/>
+              <a:t>5  Model calls stay inside AWS via a Bedrock VPC endpoint; Guardrails filter …</a:t>
+            </a:r>
+            <a:endParaRPr lang="en-US" sz="930" dirty="0"/>
           </a:p>
           <a:p>
             <a:pPr indent="0" marL="0">
@@ -4954,14 +6421,14 @@
               <a:buNone/>
             </a:pPr>
             <a:r>
-              <a:rPr lang="en-US" sz="1050" dirty="0">
+              <a:rPr lang="en-US" sz="930" dirty="0">
                 <a:solidFill>
                   <a:srgbClr val="1B2440"/>
                 </a:solidFill>
               </a:rPr>
-              <a:t>6  Workflow pauses at the human-review gate (Step Functions waitForTaskToken) — a named official, identified by the same JWT, approves.</a:t>
-            </a:r>
-            <a:endParaRPr lang="en-US" sz="1050" dirty="0"/>
+              <a:t>6  Workflow pauses at the human-review gate (Step Functions waitForTaskToken)…</a:t>
+            </a:r>
+            <a:endParaRPr lang="en-US" sz="930" dirty="0"/>
           </a:p>
           <a:p>
             <a:pPr indent="0" marL="0">
@@ -4971,14 +6438,14 @@
               <a:buNone/>
             </a:pPr>
             <a:r>
-              <a:rPr lang="en-US" sz="1050" dirty="0">
+              <a:rPr lang="en-US" sz="930" dirty="0">
                 <a:solidFill>
                   <a:srgbClr val="1B2440"/>
                 </a:solidFill>
               </a:rPr>
-              <a:t>7  On approval the action commits; case state, append-only audit and finalized records persist (S3 Object Lock WORM).</a:t>
-            </a:r>
-            <a:endParaRPr lang="en-US" sz="1050" dirty="0"/>
+              <a:t>7  On approval the action commits; case state, append-only audit and finalize…</a:t>
+            </a:r>
+            <a:endParaRPr lang="en-US" sz="930" dirty="0"/>
           </a:p>
           <a:p>
             <a:pPr indent="0" marL="0">
@@ -4988,14 +6455,14 @@
               <a:buNone/>
             </a:pPr>
             <a:r>
-              <a:rPr lang="en-US" sz="1050" dirty="0">
+              <a:rPr lang="en-US" sz="930" dirty="0">
                 <a:solidFill>
                   <a:srgbClr val="1B2440"/>
                 </a:solidFill>
               </a:rPr>
-              <a:t>8  Every step — node, timestamp, JWT subject/actor, data sources, model version — lands in one examiner-ready audit trail.</a:t>
-            </a:r>
-            <a:endParaRPr lang="en-US" sz="1050" dirty="0"/>
+              <a:t>8  Every step — node, timestamp, JWT subject/actor, data sources, model versi…</a:t>
+            </a:r>
+            <a:endParaRPr lang="en-US" sz="930" dirty="0"/>
           </a:p>
         </p:txBody>
       </p:sp>

--- a/decks/SLG-06-Procurement-Grants.pptx
+++ b/decks/SLG-06-Procurement-Grants.pptx
@@ -6632,7 +6632,7 @@
                   <a:srgbClr val="CADCFC"/>
                 </a:solidFill>
               </a:rPr>
-              <a:t>MEASURED OUTCOMES (illustrative for a reference agency; sources cited)</a:t>
+              <a:t>MEASURED OUTCOMES — documented results from named deployments &amp; published benchmarks (vendor-reported where noted)</a:t>
             </a:r>
             <a:endParaRPr lang="en-US" sz="1200" dirty="0"/>
           </a:p>
@@ -6671,7 +6671,7 @@
                 <a:ea typeface="Cambria" pitchFamily="34" charset="-122"/>
                 <a:cs typeface="Cambria" pitchFamily="34" charset="-120"/>
               </a:rPr>
-              <a:t>−17%</a:t>
+              <a:t>−50%</a:t>
             </a:r>
             <a:endParaRPr lang="en-US" sz="3200" dirty="0"/>
           </a:p>
@@ -6707,7 +6707,7 @@
                   <a:srgbClr val="CADCFC"/>
                 </a:solidFill>
               </a:rPr>
-              <a:t>RFP drafting time (AI, 2025)</a:t>
+              <a:t>internal procurement review cycle</a:t>
             </a:r>
             <a:endParaRPr lang="en-US" sz="1150" dirty="0"/>
           </a:p>
@@ -6746,7 +6746,7 @@
                 <a:ea typeface="Cambria" pitchFamily="34" charset="-122"/>
                 <a:cs typeface="Cambria" pitchFamily="34" charset="-120"/>
               </a:rPr>
-              <a:t>↓</a:t>
+              <a:t>50–70%</a:t>
             </a:r>
             <a:endParaRPr lang="en-US" sz="3200" dirty="0"/>
           </a:p>
@@ -6782,7 +6782,7 @@
                   <a:srgbClr val="CADCFC"/>
                 </a:solidFill>
               </a:rPr>
-              <a:t>solicitation cycle time</a:t>
+              <a:t>solicitation drafting time</a:t>
             </a:r>
             <a:endParaRPr lang="en-US" sz="1150" dirty="0"/>
           </a:p>
@@ -6821,7 +6821,7 @@
                 <a:ea typeface="Cambria" pitchFamily="34" charset="-122"/>
                 <a:cs typeface="Cambria" pitchFamily="34" charset="-120"/>
               </a:rPr>
-              <a:t>↑</a:t>
+              <a:t>−17%</a:t>
             </a:r>
             <a:endParaRPr lang="en-US" sz="3200" dirty="0"/>
           </a:p>
@@ -6857,7 +6857,7 @@
                   <a:srgbClr val="CADCFC"/>
                 </a:solidFill>
               </a:rPr>
-              <a:t>clause consistency</a:t>
+              <a:t>RFP completion time (2025)</a:t>
             </a:r>
             <a:endParaRPr lang="en-US" sz="1150" dirty="0"/>
           </a:p>
@@ -6896,7 +6896,7 @@
                 <a:ea typeface="Cambria" pitchFamily="34" charset="-122"/>
                 <a:cs typeface="Cambria" pitchFamily="34" charset="-120"/>
               </a:rPr>
-              <a:t>↑</a:t>
+              <a:t>57 days</a:t>
             </a:r>
             <a:endParaRPr lang="en-US" sz="3200" dirty="0"/>
           </a:p>
@@ -6932,7 +6932,7 @@
                   <a:srgbClr val="CADCFC"/>
                 </a:solidFill>
               </a:rPr>
-              <a:t>grant submissions completed</a:t>
+              <a:t>avg public-sector cycle today (context)</a:t>
             </a:r>
             <a:endParaRPr lang="en-US" sz="1150" dirty="0"/>
           </a:p>
@@ -7297,7 +7297,7 @@
                   <a:srgbClr val="5B6488"/>
                 </a:solidFill>
               </a:rPr>
-              <a:t>Sources: Euna/Bonfire public-procurement cycle data  ·  GAO-24-106528 (DoD PALT)  ·  Inventive.ai 2025 (vendor)</a:t>
+              <a:t>Sources: Inventive.ai 2025 — vendor-reported (−50% review, 50–70% drafting, −17%)  ·  Euna/Bonfire (57-day cycle)  ·  GAO-24-106528 (DoD PALT)</a:t>
             </a:r>
             <a:endParaRPr lang="en-US" sz="850" dirty="0"/>
           </a:p>

--- a/decks/SLG-06-Procurement-Grants.pptx
+++ b/decks/SLG-06-Procurement-Grants.pptx
@@ -507,7 +507,9 @@
           <a:p>
             <a:r>
               <a:rPr lang="en-US" dirty="0"/>
-              <a:t>TIMING ~1.5 min. 'Procurement is where good policy goes to wait.' Months of document work; the agent compresses the drafting and evaluation, not the decision.</a:t>
+              <a:t>TIMING ~1.5 min.
+SHOW: title and your name.
+SAY: 'Procurement is where good policy goes to wait — months of document work. The agent compresses the drafting and the evaluation, never the decision.'</a:t>
             </a:r>
             <a:endParaRPr lang="en-US" dirty="0"/>
           </a:p>
@@ -595,7 +597,9 @@
           <a:p>
             <a:r>
               <a:rPr lang="en-US" dirty="0"/>
-              <a:t>TIMING ~2.5 min. Average public-sector RFP cycle ~57 days posting-to-award (Euna, 6,000+ RFPs); GAO documents DoD acquisition lead time rising ~70 days for large contracts. AI drafting cut RFP completion ~17% (vendor — flag it). Frame: cycle time is the lever; the award is sacred.</a:t>
+              <a:t>TIMING ~2.5 min.
+SHOW: the 57 DAYS → WEEKS headline and three stat cards.
+SAY: 'Average public-sector RFP cycle is about 57 days posting-to-award. GAO documents DoD lead time rising about 70 days for large contracts. AI drafting cut RFP completion about 17% — vendor-reported. Cycle time is the lever; the award is sacred.'</a:t>
             </a:r>
             <a:endParaRPr lang="en-US" dirty="0"/>
           </a:p>
@@ -683,7 +687,9 @@
           <a:p>
             <a:r>
               <a:rPr lang="en-US" dirty="0"/>
-              <a:t>TIMING ~3 min. Situation → need. Constraint: the agent applies a published, deterministic rubric and organizes evidence — it never selects the winner or changes criteria. Protest-defensibility is the theme.</a:t>
+              <a:t>TIMING ~3 min.
+SHOW: situation, need, constraint bar.
+SAY: 'The constraint: the agent applies a published, deterministic rubric and organizes evidence — it never selects the winner or changes criteria. Protest-defensibility is the theme.'</a:t>
             </a:r>
             <a:endParaRPr lang="en-US" dirty="0"/>
           </a:p>
@@ -771,7 +777,9 @@
           <a:p>
             <a:r>
               <a:rPr lang="en-US" dirty="0"/>
-              <a:t>TIMING ~3.5 min. Walk the steps. Award is the withheld action (in code, tested). Scoring is deterministic. The green gate is the analyst; the officer awards.</a:t>
+              <a:t>TIMING ~3.5 min.
+SHOW: the pipeline; green gate is the analyst; trust cards (award withheld).
+SAY: 'Walk find → draft → compare on a published rubric → compliance → gate. Award is the withheld action, in code and tested.'</a:t>
             </a:r>
             <a:endParaRPr lang="en-US" dirty="0"/>
           </a:p>
@@ -859,7 +867,9 @@
           <a:p>
             <a:r>
               <a:rPr lang="en-US" dirty="0"/>
-              <a:t>TIMING ~4.5 min. Architecture; note the immutable evaluation record (append-only audit + WORM) for protest defensibility.</a:t>
+              <a:t>TIMING ~4.5 min.
+SHOW: the architecture diagram; immutable evaluation record.
+SAY: 'Note the immutable evaluation record — append-only audit plus WORM — for protest defensibility.'</a:t>
             </a:r>
             <a:endParaRPr lang="en-US" dirty="0"/>
           </a:p>
@@ -947,7 +957,10 @@
           <a:p>
             <a:r>
               <a:rPr lang="en-US" dirty="0"/>
-              <a:t>TIMING ~4 min. Outcomes: faster drafting and cycle time, clause consistency, more grants captured. Honest: AI-drafting figures are vendor-sourced; validate per agency. Close: same governance, plus the bias-testing harness for evaluations.</a:t>
+              <a:t>TIMING ~4 min.
+SHOW: outcomes band, cards, takeaway.
+SAY: 'Vendor-reported: roughly −50% internal review cycle, 50 to 70% drafting time, −17% RFP completion. The 57-day average is the baseline today.'
+TRADEOFF TALK TRACK: (1) award withheld — no auto-pick, so a protest-defensible human decision; (2) a deterministic published rubric over model scoring — defined up front, but bias-testable and consistent; (3) an immutable evaluation record costs storage but every score survives a protest. CLOSE: 'Shorten the paperwork, protect the decision — the agent drafts and organizes; the officer awards.'</a:t>
             </a:r>
             <a:endParaRPr lang="en-US" dirty="0"/>
           </a:p>
@@ -7037,7 +7050,7 @@
                   <a:srgbClr val="1B2440"/>
                 </a:solidFill>
               </a:rPr>
-              <a:t>Award withheld — the legally consequential decision stays with the officer.</a:t>
+              <a:t>Award withheld from the agent over automated selection — the procurement officer owns the award. Cost: no auto-pick; payoff: a protest-defensible, human-owned decision.</a:t>
             </a:r>
             <a:endParaRPr lang="en-US" sz="1100" dirty="0"/>
           </a:p>
@@ -7055,7 +7068,7 @@
                   <a:srgbClr val="1B2440"/>
                 </a:solidFill>
               </a:rPr>
-              <a:t>Deterministic published rubric over model-judged scoring (defensible, bias-tested).</a:t>
+              <a:t>Deterministic published rubric over model-judged scoring. Cost: the rubric must be defined up front; payoff: bias-testable, consistent, auditable evaluations.</a:t>
             </a:r>
             <a:endParaRPr lang="en-US" sz="1100" dirty="0"/>
           </a:p>
@@ -7073,7 +7086,7 @@
                   <a:srgbClr val="1B2440"/>
                 </a:solidFill>
               </a:rPr>
-              <a:t>Immutable evaluation record accepted as a storage cost for protest defensibility.</a:t>
+              <a:t>Immutable evaluation record over lean storage. Cost: more retained artifacts; payoff: every score and source survives a bid protest.</a:t>
             </a:r>
             <a:endParaRPr lang="en-US" sz="1100" dirty="0"/>
           </a:p>

--- a/decks/SLG-06-Procurement-Grants.pptx
+++ b/decks/SLG-06-Procurement-Grants.pptx
@@ -507,7 +507,7 @@
           <a:p>
             <a:r>
               <a:rPr lang="en-US" dirty="0"/>
-              <a:t>[~30 sec] Be the most honest on this one — it's the agent with the weakest outcome evidence, and saying so out loud builds credibility for the rest. Frame it as drafting assistance with award authority untouched.</a:t>
+              <a:t>[~30 sec] Frame this as drafting assistance with award authority untouched — but you now have a strong NAMED proof point (Oklahoma) that AI is already delivering hard procurement value at the state level, so you no longer have to be apologetic. Lead with the named state, then bring it back to the drafting agent.</a:t>
             </a:r>
             <a:endParaRPr lang="en-US" dirty="0"/>
           </a:p>
@@ -947,7 +947,7 @@
           <a:p>
             <a:r>
               <a:rPr lang="en-US" dirty="0"/>
-              <a:t>[~60 sec] Say it straight: I could not verify a named government deployment with a hard procurement-AI metric, so I'm not dressing one up. The ~70% drafting-time reduction is a real vendor claim but from an unnamed state DOT — labeled on the slide as vendor/unnamed. The honest, defensible pitch is: the writing burden is where AI safely helps; everything consequential stays human and audited. That candor is itself a selling point to a skeptical CISO.</a:t>
+              <a:t>[~75 sec] You now have a genuinely strong NAMED proof point — use it. Oklahoma's OMES (Celonis Process Copilot on the state's PeopleSoft data) flagged $6.8B in purchasing inefficiencies and, after a legislative report found $3B of purchases lacked oversight, reviewed ALL procurement for 100+ agencies in 60 days — versus up to 8 audits a year before, often on purchases 2-3 years old (GovTech, named official Janet Morrow, Feb 2025). One honesty caveat to keep in your pocket: Oklahoma is procurement OVERSIGHT / spend-analytics AI, not solicitation drafting — so present it as proof that AI returns hard dollars in state procurement, then bring it back to what THIS agent does (governed drafting). Pennsylvania's ChatGPT Enterprise pilot adds a second named state (~8 hrs/week per worker, Gov. Shapiro on the record, with procurement a named beneficiary). Dallas + Hazel AI is a named city doing solicitation drafting with AI but no hard metric yet — use as 'adoption is real, drafting outcomes still emerging.' And be straight that no named state/local GRANTS-AI deployment with a hard metric exists yet — keep grants framed as drafting/intake assistance.</a:t>
             </a:r>
             <a:endParaRPr lang="en-US" dirty="0"/>
           </a:p>
@@ -6648,7 +6648,7 @@
                 <a:ea typeface="Trebuchet MS" pitchFamily="34" charset="-122"/>
                 <a:cs typeface="Trebuchet MS" pitchFamily="34" charset="-120"/>
               </a:rPr>
-              <a:t>Less time writing, more time competing and awarding well.</a:t>
+              <a:t>States are already getting hard, named value from procurement AI.</a:t>
             </a:r>
             <a:endParaRPr lang="en-US" sz="2500" dirty="0"/>
           </a:p>
@@ -6706,7 +6706,7 @@
               <a:buNone/>
             </a:pPr>
             <a:r>
-              <a:rPr lang="en-US" sz="2800" b="1" dirty="0">
+              <a:rPr lang="en-US" sz="3400" b="1" dirty="0">
                 <a:solidFill>
                   <a:srgbClr val="FF9900"/>
                 </a:solidFill>
@@ -6714,9 +6714,9 @@
                 <a:ea typeface="Trebuchet MS" pitchFamily="34" charset="-122"/>
                 <a:cs typeface="Trebuchet MS" pitchFamily="34" charset="-120"/>
               </a:rPr>
-              <a:t>~70% less</a:t>
-            </a:r>
-            <a:endParaRPr lang="en-US" sz="2800" dirty="0"/>
+              <a:t>$6.8B</a:t>
+            </a:r>
+            <a:endParaRPr lang="en-US" sz="3400" dirty="0"/>
           </a:p>
         </p:txBody>
       </p:sp>
@@ -6756,7 +6756,7 @@
                 <a:ea typeface="Calibri" pitchFamily="34" charset="-122"/>
                 <a:cs typeface="Calibri" pitchFamily="34" charset="-120"/>
               </a:rPr>
-              <a:t>RFP-drafting time using an AI assistant trained on prior solicitations</a:t>
+              <a:t>purchasing inefficiencies flagged by Oklahoma OMES procurement AI</a:t>
             </a:r>
             <a:endParaRPr lang="en-US" sz="1100" dirty="0"/>
           </a:p>
@@ -6771,7 +6771,7 @@
         <p:spPr>
           <a:xfrm>
             <a:off x="1024128" y="3118104"/>
-            <a:ext cx="1962302" cy="256032"/>
+            <a:ext cx="1062533" cy="256032"/>
           </a:xfrm>
           <a:prstGeom prst="rect">
             <a:avLst>
@@ -6799,7 +6799,7 @@
                 <a:ea typeface="Calibri" pitchFamily="34" charset="-122"/>
                 <a:cs typeface="Calibri" pitchFamily="34" charset="-120"/>
               </a:rPr>
-              <a:t>VENDOR · UNNAMED AGENCY</a:t>
+              <a:t>NAMED STATE</a:t>
             </a:r>
             <a:endParaRPr lang="en-US" sz="800" dirty="0"/>
           </a:p>
@@ -6857,7 +6857,7 @@
               <a:buNone/>
             </a:pPr>
             <a:r>
-              <a:rPr lang="en-US" sz="2800" b="1" dirty="0">
+              <a:rPr lang="en-US" sz="2200" b="1" dirty="0">
                 <a:solidFill>
                   <a:srgbClr val="FF9900"/>
                 </a:solidFill>
@@ -6865,9 +6865,9 @@
                 <a:ea typeface="Trebuchet MS" pitchFamily="34" charset="-122"/>
                 <a:cs typeface="Trebuchet MS" pitchFamily="34" charset="-120"/>
               </a:rPr>
-              <a:t>57 → faster</a:t>
-            </a:r>
-            <a:endParaRPr lang="en-US" sz="2800" dirty="0"/>
+              <a:t>All spend, 60 days</a:t>
+            </a:r>
+            <a:endParaRPr lang="en-US" sz="2200" dirty="0"/>
           </a:p>
         </p:txBody>
       </p:sp>
@@ -6907,7 +6907,7 @@
                 <a:ea typeface="Calibri" pitchFamily="34" charset="-122"/>
                 <a:cs typeface="Calibri" pitchFamily="34" charset="-120"/>
               </a:rPr>
-              <a:t>compress the writing share of the posting-to-award cycle</a:t>
+              <a:t>Oklahoma reviewed all state procurement vs. ~8 audits/year before</a:t>
             </a:r>
             <a:endParaRPr lang="en-US" sz="1100" dirty="0"/>
           </a:p>
@@ -6950,7 +6950,7 @@
                 <a:ea typeface="Calibri" pitchFamily="34" charset="-122"/>
                 <a:cs typeface="Calibri" pitchFamily="34" charset="-120"/>
               </a:rPr>
-              <a:t>DIRECTIONAL</a:t>
+              <a:t>NAMED STATE</a:t>
             </a:r>
             <a:endParaRPr lang="en-US" sz="800" dirty="0"/>
           </a:p>
@@ -7008,7 +7008,7 @@
               <a:buNone/>
             </a:pPr>
             <a:r>
-              <a:rPr lang="en-US" sz="2400" b="1" dirty="0">
+              <a:rPr lang="en-US" sz="2600" b="1" dirty="0">
                 <a:solidFill>
                   <a:srgbClr val="FF9900"/>
                 </a:solidFill>
@@ -7016,9 +7016,9 @@
                 <a:ea typeface="Trebuchet MS" pitchFamily="34" charset="-122"/>
                 <a:cs typeface="Trebuchet MS" pitchFamily="34" charset="-120"/>
               </a:rPr>
-              <a:t>Audit-by-design</a:t>
-            </a:r>
-            <a:endParaRPr lang="en-US" sz="2400" dirty="0"/>
+              <a:t>8 hrs / week</a:t>
+            </a:r>
+            <a:endParaRPr lang="en-US" sz="2600" dirty="0"/>
           </a:p>
         </p:txBody>
       </p:sp>
@@ -7058,7 +7058,7 @@
                 <a:ea typeface="Calibri" pitchFamily="34" charset="-122"/>
                 <a:cs typeface="Calibri" pitchFamily="34" charset="-120"/>
               </a:rPr>
-              <a:t>every draft, edit and award rationale captured immutably</a:t>
+              <a:t>saved per worker in Pennsylvania's AI pilot (procurement a named use case)</a:t>
             </a:r>
             <a:endParaRPr lang="en-US" sz="1100" dirty="0"/>
           </a:p>
@@ -7073,7 +7073,7 @@
         <p:spPr>
           <a:xfrm>
             <a:off x="8217408" y="3118104"/>
-            <a:ext cx="1137514" cy="256032"/>
+            <a:ext cx="1062533" cy="256032"/>
           </a:xfrm>
           <a:prstGeom prst="rect">
             <a:avLst>
@@ -7101,7 +7101,7 @@
                 <a:ea typeface="Calibri" pitchFamily="34" charset="-122"/>
                 <a:cs typeface="Calibri" pitchFamily="34" charset="-120"/>
               </a:rPr>
-              <a:t>ARCHITECTURE</a:t>
+              <a:t>NAMED STATE</a:t>
             </a:r>
             <a:endParaRPr lang="en-US" sz="800" dirty="0"/>
           </a:p>
@@ -7182,7 +7182,7 @@
                 <a:ea typeface="Calibri" pitchFamily="34" charset="-122"/>
                 <a:cs typeface="Calibri" pitchFamily="34" charset="-120"/>
               </a:rPr>
-              <a:t>The writing burden — dozens of hours per solicitation — is where AI safely helps. Faster, more complete drafts mean more solicitations out the door and stronger competition, while evaluation and award stay human and every version is logged for protest defense.</a:t>
+              <a:t>Named states are turning AI on procurement into hard dollars: Oklahoma flagged $6.8B in inefficiencies and reviewed all state spend in 60 days. This agent applies the same governed pattern to the writing burden — faster, more complete solicitations and more competition — while evaluation and award stay human and every version is logged for protest defense.</a:t>
             </a:r>
             <a:endParaRPr lang="en-US" sz="1150" dirty="0"/>
           </a:p>

--- a/decks/SLG-06-Procurement-Grants.pptx
+++ b/decks/SLG-06-Procurement-Grants.pptx
@@ -7246,28 +7246,28 @@
         <a:sysClr val="window" lastClr="FFFFFF"/>
       </a:lt1>
       <a:dk2>
-        <a:srgbClr val="44546A"/>
+        <a:srgbClr val="232F3E"/>
       </a:dk2>
       <a:lt2>
         <a:srgbClr val="E7E6E6"/>
       </a:lt2>
       <a:accent1>
-        <a:srgbClr val="4472C4"/>
+        <a:srgbClr val="FF9900"/>
       </a:accent1>
       <a:accent2>
-        <a:srgbClr val="ED7D31"/>
+        <a:srgbClr val="232F3E"/>
       </a:accent2>
       <a:accent3>
-        <a:srgbClr val="A5A5A5"/>
+        <a:srgbClr val="01A88D"/>
       </a:accent3>
       <a:accent4>
-        <a:srgbClr val="FFC000"/>
+        <a:srgbClr val="8C4FFF"/>
       </a:accent4>
       <a:accent5>
-        <a:srgbClr val="5B9BD5"/>
+        <a:srgbClr val="DD344C"/>
       </a:accent5>
       <a:accent6>
-        <a:srgbClr val="70AD47"/>
+        <a:srgbClr val="ED7100"/>
       </a:accent6>
       <a:hlink>
         <a:srgbClr val="0563C1"/>
@@ -7278,7 +7278,7 @@
     </a:clrScheme>
     <a:fontScheme name="Office">
       <a:majorFont>
-        <a:latin typeface="Trebuchet MS"/>
+        <a:latin typeface="Amazon Ember"/>
         <a:ea typeface=""/>
         <a:cs typeface=""/>
         <a:font script="Jpan" typeface="游ゴシック Light"/>
@@ -7330,7 +7330,7 @@
         <a:font script="Tfng" typeface="Ebrima"/>
       </a:majorFont>
       <a:minorFont>
-        <a:latin typeface="Calibri"/>
+        <a:latin typeface="Amazon Ember"/>
         <a:ea typeface=""/>
         <a:cs typeface=""/>
         <a:font script="Jpan" typeface="游ゴシック"/>

--- a/decks/SLG-06-Procurement-Grants.pptx
+++ b/decks/SLG-06-Procurement-Grants.pptx
@@ -11,6 +11,7 @@
     <p:sldId id="259" r:id="rId5"/>
     <p:sldId id="260" r:id="rId6"/>
     <p:sldId id="261" r:id="rId7"/>
+    <p:sldId id="262" r:id="rId13"/>
   </p:sldIdLst>
   <p:notesMasterIdLst>
     <p:notesMasterId r:id="rId8"/>
@@ -1589,6 +1590,40 @@
           </a:p>
         </p:txBody>
       </p:sp>
+      <p:sp>
+        <p:nvSpPr>
+          <p:cNvPr id="9" name="TextBox 8"/>
+          <p:cNvSpPr txBox="1"/>
+          <p:nvPr/>
+        </p:nvSpPr>
+        <p:spPr>
+          <a:xfrm>
+            <a:off x="365760" y="6291072"/>
+            <a:ext cx="11460175" cy="457200"/>
+          </a:xfrm>
+          <a:prstGeom prst="rect">
+            <a:avLst/>
+          </a:prstGeom>
+          <a:noFill/>
+        </p:spPr>
+        <p:txBody>
+          <a:bodyPr wrap="square" tIns="0" bIns="0">
+            <a:spAutoFit/>
+          </a:bodyPr>
+          <a:lstStyle/>
+          <a:p>
+            <a:pPr algn="l"/>
+            <a:r>
+              <a:rPr sz="800" i="1">
+                <a:solidFill>
+                  <a:srgbClr val="879296"/>
+                </a:solidFill>
+              </a:rPr>
+              <a:t>Reference accelerator — not an AWS service, not AWS-supported software, not a compliance certification, and not production-ready for regulated data without customer-specific engineering, testing, authorization, and operational ownership.</a:t>
+            </a:r>
+          </a:p>
+        </p:txBody>
+      </p:sp>
     </p:spTree>
   </p:cSld>
   <p:clrMapOvr>
@@ -7224,6 +7259,198 @@
               <a:t>Figures are documented outcomes from named deployments, labeled by evidence tier. Vendor-reported vs. government/peer-reviewed sourcing in DECK-SOURCES.md. Improvement applied to a reference agency — not a guarantee.</a:t>
             </a:r>
             <a:endParaRPr lang="en-US" sz="830" dirty="0"/>
+          </a:p>
+        </p:txBody>
+      </p:sp>
+    </p:spTree>
+  </p:cSld>
+  <p:clrMapOvr>
+    <a:masterClrMapping/>
+  </p:clrMapOvr>
+</p:sld>
+</file>
+
+<file path=ppt/slides/slide7.xml><?xml version="1.0" encoding="utf-8"?>
+<p:sld xmlns:a="http://schemas.openxmlformats.org/drawingml/2006/main" xmlns:p="http://schemas.openxmlformats.org/presentationml/2006/main" xmlns:r="http://schemas.openxmlformats.org/officeDocument/2006/relationships">
+  <p:cSld>
+    <p:spTree>
+      <p:nvGrpSpPr>
+        <p:cNvPr id="1" name=""/>
+        <p:cNvGrpSpPr/>
+        <p:nvPr/>
+      </p:nvGrpSpPr>
+      <p:grpSpPr/>
+      <p:sp>
+        <p:nvSpPr>
+          <p:cNvPr id="2" name="Rectangle 1"/>
+          <p:cNvSpPr/>
+          <p:nvPr/>
+        </p:nvSpPr>
+        <p:spPr>
+          <a:xfrm>
+            <a:off x="0" y="0"/>
+            <a:ext cx="12191695" cy="6858000"/>
+          </a:xfrm>
+          <a:prstGeom prst="rect">
+            <a:avLst/>
+          </a:prstGeom>
+          <a:solidFill>
+            <a:srgbClr val="232F3E"/>
+          </a:solidFill>
+          <a:ln>
+            <a:noFill/>
+          </a:ln>
+          <a:effectLst/>
+        </p:spPr>
+        <p:style>
+          <a:lnRef idx="1">
+            <a:schemeClr val="accent1"/>
+          </a:lnRef>
+          <a:fillRef idx="3">
+            <a:schemeClr val="accent1"/>
+          </a:fillRef>
+          <a:effectRef idx="2">
+            <a:schemeClr val="accent1"/>
+          </a:effectRef>
+          <a:fontRef idx="minor">
+            <a:schemeClr val="lt1"/>
+          </a:fontRef>
+        </p:style>
+        <p:txBody>
+          <a:bodyPr rtlCol="0" anchor="ctr"/>
+          <a:lstStyle/>
+          <a:p>
+            <a:pPr algn="ctr"/>
+          </a:p>
+        </p:txBody>
+      </p:sp>
+      <p:sp>
+        <p:nvSpPr>
+          <p:cNvPr id="3" name="Rectangle 2"/>
+          <p:cNvSpPr/>
+          <p:nvPr/>
+        </p:nvSpPr>
+        <p:spPr>
+          <a:xfrm>
+            <a:off x="822960" y="1051560"/>
+            <a:ext cx="2011680" cy="82296"/>
+          </a:xfrm>
+          <a:prstGeom prst="rect">
+            <a:avLst/>
+          </a:prstGeom>
+          <a:solidFill>
+            <a:srgbClr val="FF9900"/>
+          </a:solidFill>
+          <a:ln>
+            <a:noFill/>
+          </a:ln>
+          <a:effectLst/>
+        </p:spPr>
+        <p:style>
+          <a:lnRef idx="1">
+            <a:schemeClr val="accent1"/>
+          </a:lnRef>
+          <a:fillRef idx="3">
+            <a:schemeClr val="accent1"/>
+          </a:fillRef>
+          <a:effectRef idx="2">
+            <a:schemeClr val="accent1"/>
+          </a:effectRef>
+          <a:fontRef idx="minor">
+            <a:schemeClr val="lt1"/>
+          </a:fontRef>
+        </p:style>
+        <p:txBody>
+          <a:bodyPr rtlCol="0" anchor="ctr"/>
+          <a:lstStyle/>
+          <a:p>
+            <a:pPr algn="ctr"/>
+          </a:p>
+        </p:txBody>
+      </p:sp>
+      <p:sp>
+        <p:nvSpPr>
+          <p:cNvPr id="4" name="TextBox 3"/>
+          <p:cNvSpPr txBox="1"/>
+          <p:nvPr/>
+        </p:nvSpPr>
+        <p:spPr>
+          <a:xfrm>
+            <a:off x="822960" y="1234440"/>
+            <a:ext cx="10545775" cy="914400"/>
+          </a:xfrm>
+          <a:prstGeom prst="rect">
+            <a:avLst/>
+          </a:prstGeom>
+          <a:noFill/>
+        </p:spPr>
+        <p:txBody>
+          <a:bodyPr wrap="square">
+            <a:spAutoFit/>
+          </a:bodyPr>
+          <a:lstStyle/>
+          <a:p>
+            <a:r>
+              <a:rPr sz="3400" b="1">
+                <a:solidFill>
+                  <a:srgbClr val="FFFFFF"/>
+                </a:solidFill>
+              </a:rPr>
+              <a:t>Disclaimer &amp; Shared Responsibility</a:t>
+            </a:r>
+          </a:p>
+        </p:txBody>
+      </p:sp>
+      <p:sp>
+        <p:nvSpPr>
+          <p:cNvPr id="5" name="TextBox 4"/>
+          <p:cNvSpPr txBox="1"/>
+          <p:nvPr/>
+        </p:nvSpPr>
+        <p:spPr>
+          <a:xfrm>
+            <a:off x="822960" y="2468880"/>
+            <a:ext cx="10545775" cy="3108960"/>
+          </a:xfrm>
+          <a:prstGeom prst="rect">
+            <a:avLst/>
+          </a:prstGeom>
+          <a:noFill/>
+        </p:spPr>
+        <p:txBody>
+          <a:bodyPr wrap="square">
+            <a:spAutoFit/>
+          </a:bodyPr>
+          <a:lstStyle/>
+          <a:p>
+            <a:pPr>
+              <a:spcAft>
+                <a:spcPts val="1200"/>
+              </a:spcAft>
+            </a:pPr>
+            <a:r>
+              <a:rPr sz="1600">
+                <a:solidFill>
+                  <a:srgbClr val="D5DBDB"/>
+                </a:solidFill>
+              </a:rPr>
+              <a:t>Reference accelerator — not an AWS service, not AWS-supported software, not a compliance certification, and not production-ready for regulated data without customer-specific engineering, testing, authorization, and operational ownership.</a:t>
+            </a:r>
+          </a:p>
+          <a:p>
+            <a:pPr>
+              <a:spcAft>
+                <a:spcPts val="1200"/>
+              </a:spcAft>
+            </a:pPr>
+            <a:r>
+              <a:rPr sz="1600">
+                <a:solidFill>
+                  <a:srgbClr val="D5DBDB"/>
+                </a:solidFill>
+              </a:rPr>
+              <a:t>Built on AWS; not affiliated with or endorsed by Amazon Web Services.</a:t>
+            </a:r>
           </a:p>
         </p:txBody>
       </p:sp>
